--- a/lecons/F3/42_FORM4_LESSON38_Factors_of_Temperature.pptx
+++ b/lecons/F3/42_FORM4_LESSON38_Factors_of_Temperature.pptx
@@ -50,9 +50,10 @@
     <p:sldId id="298" r:id="rId44"/>
     <p:sldId id="299" r:id="rId45"/>
     <p:sldId id="300" r:id="rId46"/>
+    <p:sldId id="301" r:id="rId47"/>
   </p:sldIdLst>
   <p:notesMasterIdLst>
-    <p:notesMasterId r:id="rId47"/>
+    <p:notesMasterId r:id="rId48"/>
   </p:notesMasterIdLst>
   <p:sldSz cx="12192000" cy="6858000"/>
   <p:notesSz cx="6858000" cy="12192000"/>
@@ -634,7 +635,7 @@
           <a:p>
             <a:r>
               <a:rPr lang="en-US" dirty="0"/>
-              <a:t>Listen carefully to this situation from real life. Oumar travels from Garoua to Ngaoundéré. In Garoua, it is 35 °C. In Ngaoundéré, in the evening, he needs a sweater. The two towns are not far apart. Think about it, because I am going to ask you some questions.</a:t>
+              <a:t>Listen carefully to this situation from real life. Oumar travels from Garoua to Ngaoundéré, only about 270 km away. In Garoua it is 35 °C, but in Ngaoundéré, in the evening, he needs a sweater. He asks: "Why can two towns so close to each other have such different temperatures?" Think about it, because I am going to ask you some questions.</a:t>
             </a:r>
             <a:endParaRPr lang="en-US" dirty="0"/>
           </a:p>
@@ -810,7 +811,7 @@
           <a:p>
             <a:r>
               <a:rPr lang="en-US" dirty="0"/>
-              <a:t>Good. Oumar does not know why Ngaoundéré is cooler.</a:t>
+              <a:t>Good. Oumar does not know what makes temperatures different from place to place.</a:t>
             </a:r>
             <a:endParaRPr lang="en-US" dirty="0"/>
           </a:p>
@@ -898,7 +899,7 @@
           <a:p>
             <a:r>
               <a:rPr lang="en-US" dirty="0"/>
-              <a:t>Question 2: What is the difference between the two towns? Think for a moment, then raise your hand to answer.</a:t>
+              <a:t>Question 2: Which town is hotter? Think for a moment, then raise your hand to answer.</a:t>
             </a:r>
             <a:endParaRPr lang="en-US" dirty="0"/>
           </a:p>
@@ -986,7 +987,7 @@
           <a:p>
             <a:r>
               <a:rPr lang="en-US" dirty="0"/>
-              <a:t>Good. Ngaoundéré is high (1,212 m); Garoua is low.</a:t>
+              <a:t>Good. Garoua.</a:t>
             </a:r>
             <a:endParaRPr lang="en-US" dirty="0"/>
           </a:p>
@@ -1074,7 +1075,7 @@
           <a:p>
             <a:r>
               <a:rPr lang="en-US" dirty="0"/>
-              <a:t>Question 3: What happens to temperature with height? Think for a moment, then raise your hand to answer.</a:t>
+              <a:t>Question 3: What is different about Ngaoundéré? Think for a moment, then raise your hand to answer.</a:t>
             </a:r>
             <a:endParaRPr lang="en-US" dirty="0"/>
           </a:p>
@@ -1162,7 +1163,7 @@
           <a:p>
             <a:r>
               <a:rPr lang="en-US" dirty="0"/>
-              <a:t>Good. It falls.</a:t>
+              <a:t>Good. It is much higher (on the Adamawa Plateau).</a:t>
             </a:r>
             <a:endParaRPr lang="en-US" dirty="0"/>
           </a:p>
@@ -1426,7 +1427,7 @@
           <a:p>
             <a:r>
               <a:rPr lang="en-US" dirty="0"/>
-              <a:t>Activity 1. Look carefully at this diagram: sun rays at the Equator and near the poles. Observe every detail before I ask the question.</a:t>
+              <a:t>Activity 1. Look carefully at this diagram: the Sun's rays reach the Earth. Observe every detail before I ask the question.</a:t>
             </a:r>
             <a:endParaRPr lang="en-US" dirty="0"/>
           </a:p>
@@ -1602,7 +1603,7 @@
           <a:p>
             <a:r>
               <a:rPr lang="en-US" dirty="0"/>
-              <a:t>Here is the question for Activity 1: Why is it hotter near the Equator? Take one minute to think and write your answer in your rough notebook.</a:t>
+              <a:t>Here is the question for Activity 1: Why is it hotter near the Equator than near the poles? Take one minute to think and write your answer in your rough notebook.</a:t>
             </a:r>
             <a:endParaRPr lang="en-US" dirty="0"/>
           </a:p>
@@ -1690,7 +1691,7 @@
           <a:p>
             <a:r>
               <a:rPr lang="en-US" dirty="0"/>
-              <a:t>Let us check the answer together. The sun rays are direct there.</a:t>
+              <a:t>Let us check the answer together. The Sun's rays are direct near the Equator and slanting near the poles.</a:t>
             </a:r>
             <a:endParaRPr lang="en-US" dirty="0"/>
           </a:p>
@@ -1778,7 +1779,7 @@
           <a:p>
             <a:r>
               <a:rPr lang="en-US" dirty="0"/>
-              <a:t>Activity 2. Look carefully at this picture: mount Kilimanjaro, near the Equator, has snow on top. Observe every detail before I ask the question.</a:t>
+              <a:t>Activity 2. Look carefully at this picture: snow on Mount Kilimanjaro. Observe every detail before I ask the question.</a:t>
             </a:r>
             <a:endParaRPr lang="en-US" dirty="0"/>
           </a:p>
@@ -1954,7 +1955,7 @@
           <a:p>
             <a:r>
               <a:rPr lang="en-US" dirty="0"/>
-              <a:t>Let us check the answer together. It is very high. Temperature falls with height.</a:t>
+              <a:t>Let us check the answer together. It is very high, and temperature falls with height.</a:t>
             </a:r>
             <a:endParaRPr lang="en-US" dirty="0"/>
           </a:p>
@@ -2042,7 +2043,7 @@
           <a:p>
             <a:r>
               <a:rPr lang="en-US" dirty="0"/>
-              <a:t>Activity 3. Look carefully at this picture: people and animals near a big shady tree. Observe every detail before I ask the question.</a:t>
+              <a:t>Activity 3. Look carefully at this picture: cattle under trees. Observe every detail before I ask the question.</a:t>
             </a:r>
             <a:endParaRPr lang="en-US" dirty="0"/>
           </a:p>
@@ -2218,7 +2219,7 @@
           <a:p>
             <a:r>
               <a:rPr lang="en-US" dirty="0"/>
-              <a:t>Let us check the answer together. The leaves stop the sun rays.</a:t>
+              <a:t>Let us check the answer together. The leaves stop the Sun's rays and give shade.</a:t>
             </a:r>
             <a:endParaRPr lang="en-US" dirty="0"/>
           </a:p>
@@ -2394,7 +2395,7 @@
           <a:p>
             <a:r>
               <a:rPr lang="en-US" dirty="0"/>
-              <a:t>Let us copy Latitude and Altitude. Latitude and altitude affect temperature as follows. On this slide we have Latitude. Write each point on a new line, with the key term first, and explain it in your own words when we revise. When you finish, we go to the next slide.</a:t>
+              <a:t>Let us copy the definitions. The key terms of this lesson are defined as follows. On this slide we have Factor of temperature and Lapse rate. Write each point on a new line, with the key term first, and explain it in your own words when we revise.</a:t>
             </a:r>
             <a:endParaRPr lang="en-US" dirty="0"/>
           </a:p>
@@ -2570,7 +2571,7 @@
           <a:p>
             <a:r>
               <a:rPr lang="en-US" dirty="0"/>
-              <a:t>We continue with Latitude and Altitude. On this slide we have Altitude. Write each point on a new line, with the key term first, and explain it in your own words when we revise.</a:t>
+              <a:t>Let us copy Factors of Temperature. Temperature is affected by the following factors. Copy the point on 1. Latitude on the left, then draw the diagram on the right: the Sun's rays and latitude. Give it a title and label it clearly.</a:t>
             </a:r>
             <a:endParaRPr lang="en-US" dirty="0"/>
           </a:p>
@@ -2658,7 +2659,7 @@
           <a:p>
             <a:r>
               <a:rPr lang="en-US" dirty="0"/>
-              <a:t>Now draw this illustration in your notebook: the Sun's rays and latitude. Give it a title and label it clearly.</a:t>
+              <a:t>Copy the point on 2. Altitude on the left, then draw the diagram on the right: temperature and altitude. Give it a title and label it clearly.</a:t>
             </a:r>
             <a:endParaRPr lang="en-US" dirty="0"/>
           </a:p>
@@ -2746,7 +2747,7 @@
           <a:p>
             <a:r>
               <a:rPr lang="en-US" dirty="0"/>
-              <a:t>Let us copy Other Factors of Temperature. Temperature is also affected by the following factors. On this slide we have Cloud cover and Air masses and winds. Write each point on a new line, with the key term first, and explain it in your own words when we revise. When you finish, we go to the next slide.</a:t>
+              <a:t>We continue with Factors of Temperature. On this slide we have 3. Cloud cover and 4. Air masses and winds. Write each point on a new line, with the key term first, and explain it in your own words when we revise.</a:t>
             </a:r>
             <a:endParaRPr lang="en-US" dirty="0"/>
           </a:p>
@@ -2834,7 +2835,7 @@
           <a:p>
             <a:r>
               <a:rPr lang="en-US" dirty="0"/>
-              <a:t>We continue with Other Factors of Temperature. On this slide we have Distance from the sea and ocean currents and Vegetation and human activities. Write each point on a new line, with the key term first, and explain it in your own words when we revise.</a:t>
+              <a:t>Copy the point on 5. Ocean currents and distance from the sea on the left, then draw the diagram on the right: ocean currents. Give it a title and label it clearly.</a:t>
             </a:r>
             <a:endParaRPr lang="en-US" dirty="0"/>
           </a:p>
@@ -2922,7 +2923,7 @@
           <a:p>
             <a:r>
               <a:rPr lang="en-US" dirty="0"/>
-              <a:t>Now let us check what you have understood. Question 1: Why is Ngaoundéré cooler than Garoua? Answer in your exercise book.</a:t>
+              <a:t>We continue with Factors of Temperature. On this slide we have 6. Vegetation and 7. Human activities. Write each point on a new line, with the key term first, and explain it in your own words when we revise.</a:t>
             </a:r>
             <a:endParaRPr lang="en-US" dirty="0"/>
           </a:p>
@@ -3010,7 +3011,7 @@
           <a:p>
             <a:r>
               <a:rPr lang="en-US" dirty="0"/>
-              <a:t>The expected answer is: it is higher (altitude). If you got it right, well done.</a:t>
+              <a:t>Now let us check what you have understood. Question 1: Why is Ngaoundéré cooler than Garoua? Answer in your exercise book.</a:t>
             </a:r>
             <a:endParaRPr lang="en-US" dirty="0"/>
           </a:p>
@@ -3098,7 +3099,7 @@
           <a:p>
             <a:r>
               <a:rPr lang="en-US" dirty="0"/>
-              <a:t>Now let us check what you have understood. Question 2: Why is Douala's temperature range small? Answer in your exercise book.</a:t>
+              <a:t>The expected answer is: it is higher (altitude). If you got it right, well done.</a:t>
             </a:r>
             <a:endParaRPr lang="en-US" dirty="0"/>
           </a:p>
@@ -3186,7 +3187,7 @@
           <a:p>
             <a:r>
               <a:rPr lang="en-US" dirty="0"/>
-              <a:t>The expected answer is: it is near the sea. If you got it right, well done.</a:t>
+              <a:t>Now let us check what you have understood. Question 2: Why is Douala's temperature range small? Answer in your exercise book.</a:t>
             </a:r>
             <a:endParaRPr lang="en-US" dirty="0"/>
           </a:p>
@@ -3274,7 +3275,7 @@
           <a:p>
             <a:r>
               <a:rPr lang="en-US" dirty="0"/>
-              <a:t>For those who need more practice, fill in the blanks in your exercise book. The answers are: number 1, altitude; number 2, direct; number 3, small.</a:t>
+              <a:t>The expected answer is: it is near the sea. If you got it right, well done.</a:t>
             </a:r>
             <a:endParaRPr lang="en-US" dirty="0"/>
           </a:p>
@@ -3362,7 +3363,7 @@
           <a:p>
             <a:r>
               <a:rPr lang="en-US" dirty="0"/>
-              <a:t>For your homework: Put a little water in a bowl in the sun in the morning. In the evening, check how much water is left and write where you think the missing water went. We shall correct it at the beginning of our next lesson.</a:t>
+              <a:t>For those who need more practice, fill in the blanks in your exercise book. The answers are: number 1, altitude; number 2, direct; number 3, small.</a:t>
             </a:r>
             <a:endParaRPr lang="en-US" dirty="0"/>
           </a:p>
@@ -3538,7 +3539,7 @@
           <a:p>
             <a:r>
               <a:rPr lang="en-US" dirty="0"/>
-              <a:t>Our next lesson will be on Lesson 39: The Hydrological Cycle. Thank you for your attention, and see you next time.</a:t>
+              <a:t>For your homework: Put a little water in a bowl in the sun in the morning. In the evening, check how much water is left and write where you think the missing water went. We shall correct it at the beginning of our next lesson.</a:t>
             </a:r>
             <a:endParaRPr lang="en-US" dirty="0"/>
           </a:p>
@@ -3626,7 +3627,7 @@
           <a:p>
             <a:r>
               <a:rPr lang="en-US" dirty="0"/>
-              <a:t>Let us play the bilingual game. I say a word in English, and you give me the French word. Then we do the reverse.</a:t>
+              <a:t>Our next lesson will be on Lesson 39: The Hydrological Cycle. Thank you for your attention, and see you next time.</a:t>
             </a:r>
             <a:endParaRPr lang="en-US" dirty="0"/>
           </a:p>
@@ -3714,7 +3715,7 @@
           <a:p>
             <a:r>
               <a:rPr lang="en-US" dirty="0"/>
-              <a:t>I record this information in the official logbook of the class after the lesson.</a:t>
+              <a:t>Let us play the bilingual game. I say a word in English, and you give me the French word. Then we do the reverse.</a:t>
             </a:r>
             <a:endParaRPr lang="en-US" dirty="0"/>
           </a:p>
@@ -3802,7 +3803,7 @@
           <a:p>
             <a:r>
               <a:rPr lang="en-US" dirty="0"/>
-              <a:t>I complete the second page of the logbook: the matter taught, the evaluation, the homework and the attendance.</a:t>
+              <a:t>I record this information in the official logbook of the class after the lesson.</a:t>
             </a:r>
             <a:endParaRPr lang="en-US" dirty="0"/>
           </a:p>
@@ -3890,7 +3891,7 @@
           <a:p>
             <a:r>
               <a:rPr lang="en-US" dirty="0"/>
-              <a:t>This slide is for me, the teacher: it gives the timing of the lesson and what to do if the projector is not available.</a:t>
+              <a:t>I complete the second page of the logbook: the matter taught, the evaluation, the homework and the attendance.</a:t>
             </a:r>
             <a:endParaRPr lang="en-US" dirty="0"/>
           </a:p>
@@ -3978,7 +3979,7 @@
           <a:p>
             <a:r>
               <a:rPr lang="en-US" dirty="0"/>
-              <a:t>These are the references and picture credits used to prepare this lesson.</a:t>
+              <a:t>This slide is for me, the teacher: it gives the timing of the lesson and what to do if the projector is not available.</a:t>
             </a:r>
             <a:endParaRPr lang="en-US" dirty="0"/>
           </a:p>
@@ -4002,6 +4003,94 @@
             <a:fld id="{F7021451-1387-4CA6-816F-3879F97B5CBC}" type="slidenum">
               <a:rPr lang="en-US"/>
               <a:t>45</a:t>
+            </a:fld>
+            <a:endParaRPr lang="en-US"/>
+          </a:p>
+        </p:txBody>
+      </p:sp>
+    </p:spTree>
+    <p:extLst>
+      <p:ext uri="{BB962C8B-B14F-4D97-AF65-F5344CB8AC3E}">
+        <p14:creationId xmlns:p14="http://schemas.microsoft.com/office/powerpoint/2010/main" val="1024086991"/>
+      </p:ext>
+    </p:extLst>
+  </p:cSld>
+  <p:clrMapOvr>
+    <a:masterClrMapping/>
+  </p:clrMapOvr>
+</p:notes>
+</file>
+
+<file path=ppt/notesSlides/notesSlide46.xml><?xml version="1.0" encoding="utf-8"?>
+<p:notes xmlns:a="http://schemas.openxmlformats.org/drawingml/2006/main" xmlns:r="http://schemas.openxmlformats.org/officeDocument/2006/relationships" xmlns:p="http://schemas.openxmlformats.org/presentationml/2006/main">
+  <p:cSld>
+    <p:spTree>
+      <p:nvGrpSpPr>
+        <p:cNvPr id="1" name=""/>
+        <p:cNvGrpSpPr/>
+        <p:nvPr/>
+      </p:nvGrpSpPr>
+      <p:grpSpPr>
+        <a:xfrm>
+          <a:off x="0" y="0"/>
+          <a:ext cx="0" cy="0"/>
+          <a:chOff x="0" y="0"/>
+          <a:chExt cx="0" cy="0"/>
+        </a:xfrm>
+      </p:grpSpPr>
+      <p:sp>
+        <p:nvSpPr>
+          <p:cNvPr id="2" name="Slide Image Placeholder 1"/>
+          <p:cNvSpPr>
+            <a:spLocks noGrp="1" noRot="1" noChangeAspect="1"/>
+          </p:cNvSpPr>
+          <p:nvPr>
+            <p:ph type="sldImg"/>
+          </p:nvPr>
+        </p:nvSpPr>
+        <p:spPr/>
+      </p:sp>
+      <p:sp>
+        <p:nvSpPr>
+          <p:cNvPr id="3" name="Notes Placeholder 2"/>
+          <p:cNvSpPr>
+            <a:spLocks noGrp="1"/>
+          </p:cNvSpPr>
+          <p:nvPr>
+            <p:ph type="body" idx="1"/>
+          </p:nvPr>
+        </p:nvSpPr>
+        <p:spPr/>
+        <p:txBody>
+          <a:bodyPr/>
+          <a:lstStyle/>
+          <a:p>
+            <a:r>
+              <a:rPr lang="en-US" dirty="0"/>
+              <a:t>These are the references and picture credits used to prepare this lesson.</a:t>
+            </a:r>
+            <a:endParaRPr lang="en-US" dirty="0"/>
+          </a:p>
+        </p:txBody>
+      </p:sp>
+      <p:sp>
+        <p:nvSpPr>
+          <p:cNvPr id="4" name="Slide Number Placeholder 3"/>
+          <p:cNvSpPr>
+            <a:spLocks noGrp="1"/>
+          </p:cNvSpPr>
+          <p:nvPr>
+            <p:ph type="sldNum" sz="quarter" idx="10"/>
+          </p:nvPr>
+        </p:nvSpPr>
+        <p:spPr/>
+        <p:txBody>
+          <a:bodyPr/>
+          <a:lstStyle/>
+          <a:p>
+            <a:fld id="{F7021451-1387-4CA6-816F-3879F97B5CBC}" type="slidenum">
+              <a:rPr lang="en-US"/>
+              <a:t>46</a:t>
             </a:fld>
             <a:endParaRPr lang="en-US"/>
           </a:p>
@@ -5798,7 +5887,7 @@
         <p:spPr>
           <a:xfrm>
             <a:off x="0" y="658368"/>
-            <a:ext cx="5120640" cy="5833872"/>
+            <a:ext cx="3840480" cy="5833872"/>
           </a:xfrm>
           <a:prstGeom prst="rect">
             <a:avLst/>
@@ -5813,8 +5902,8 @@
         </p:nvSpPr>
         <p:spPr>
           <a:xfrm>
-            <a:off x="5349240" y="1005840"/>
-            <a:ext cx="6522415" cy="731520"/>
+            <a:off x="4069080" y="1005840"/>
+            <a:ext cx="7802575" cy="731520"/>
           </a:xfrm>
           <a:prstGeom prst="rect">
             <a:avLst/>
@@ -5854,8 +5943,8 @@
         </p:nvSpPr>
         <p:spPr>
           <a:xfrm>
-            <a:off x="5349240" y="1783080"/>
-            <a:ext cx="6522415" cy="4663440"/>
+            <a:off x="4069080" y="1783080"/>
+            <a:ext cx="7802575" cy="4663440"/>
           </a:xfrm>
           <a:prstGeom prst="rect">
             <a:avLst/>
@@ -5882,7 +5971,7 @@
                 <a:ea typeface="Times New Roman" pitchFamily="34" charset="-122"/>
                 <a:cs typeface="Times New Roman" pitchFamily="34" charset="-120"/>
               </a:rPr>
-              <a:t>Oumar travels from Garoua to Ngaoundéré. In Garoua, it is 35 °C. In Ngaoundéré, in the evening, he needs a sweater. The two towns are not far apart.</a:t>
+              <a:t>Oumar travels from Garoua to Ngaoundéré, only about 270 km away. In Garoua it is 35 °C, but in Ngaoundéré, in the evening, he needs a sweater. He asks: "Why can two towns so close to each other have such different temperatures?"</a:t>
             </a:r>
             <a:endParaRPr lang="en-US" sz="4000" dirty="0"/>
           </a:p>
@@ -6320,7 +6409,7 @@
                 <a:ea typeface="Times New Roman" pitchFamily="34" charset="-122"/>
                 <a:cs typeface="Times New Roman" pitchFamily="34" charset="-120"/>
               </a:rPr>
-              <a:t>Oumar does not know why Ngaoundéré is cooler.</a:t>
+              <a:t>Oumar does not know what makes temperatures different from place to place.</a:t>
             </a:r>
             <a:endParaRPr lang="en-US" sz="4000" dirty="0"/>
           </a:p>
@@ -6539,7 +6628,7 @@
                 <a:ea typeface="Times New Roman" pitchFamily="34" charset="-122"/>
                 <a:cs typeface="Times New Roman" pitchFamily="34" charset="-120"/>
               </a:rPr>
-              <a:t>What is the difference between the two towns?</a:t>
+              <a:t>Which town is hotter?</a:t>
             </a:r>
             <a:endParaRPr lang="en-US" sz="4000" dirty="0"/>
           </a:p>
@@ -6758,7 +6847,7 @@
                 <a:ea typeface="Times New Roman" pitchFamily="34" charset="-122"/>
                 <a:cs typeface="Times New Roman" pitchFamily="34" charset="-120"/>
               </a:rPr>
-              <a:t>Ngaoundéré is high (1,212 m); Garoua is low.</a:t>
+              <a:t>Garoua.</a:t>
             </a:r>
             <a:endParaRPr lang="en-US" sz="4000" dirty="0"/>
           </a:p>
@@ -6977,7 +7066,7 @@
                 <a:ea typeface="Times New Roman" pitchFamily="34" charset="-122"/>
                 <a:cs typeface="Times New Roman" pitchFamily="34" charset="-120"/>
               </a:rPr>
-              <a:t>What happens to temperature with height?</a:t>
+              <a:t>What is different about Ngaoundéré?</a:t>
             </a:r>
             <a:endParaRPr lang="en-US" sz="4000" dirty="0"/>
           </a:p>
@@ -7196,7 +7285,7 @@
                 <a:ea typeface="Times New Roman" pitchFamily="34" charset="-122"/>
                 <a:cs typeface="Times New Roman" pitchFamily="34" charset="-120"/>
               </a:rPr>
-              <a:t>It falls.</a:t>
+              <a:t>It is much higher (on the Adamawa Plateau).</a:t>
             </a:r>
             <a:endParaRPr lang="en-US" sz="4000" dirty="0"/>
           </a:p>
@@ -7848,7 +7937,7 @@
                 <a:ea typeface="Times New Roman" pitchFamily="34" charset="-122"/>
                 <a:cs typeface="Times New Roman" pitchFamily="34" charset="-120"/>
               </a:rPr>
-              <a:t>Sun rays at the Equator and near the poles.</a:t>
+              <a:t>The Sun's rays reach the Earth.</a:t>
             </a:r>
             <a:endParaRPr lang="en-US" sz="1800" dirty="0"/>
           </a:p>
@@ -8662,7 +8751,7 @@
                 <a:ea typeface="Times New Roman" pitchFamily="34" charset="-122"/>
                 <a:cs typeface="Times New Roman" pitchFamily="34" charset="-120"/>
               </a:rPr>
-              <a:t>Why is it hotter near the Equator?</a:t>
+              <a:t>Why is it hotter near the Equator than near the poles?</a:t>
             </a:r>
             <a:endParaRPr lang="en-US" sz="4000" dirty="0"/>
           </a:p>
@@ -8881,7 +8970,7 @@
                 <a:ea typeface="Times New Roman" pitchFamily="34" charset="-122"/>
                 <a:cs typeface="Times New Roman" pitchFamily="34" charset="-120"/>
               </a:rPr>
-              <a:t>The sun rays are direct there.</a:t>
+              <a:t>The Sun's rays are direct near the Equator and slanting near the poles.</a:t>
             </a:r>
             <a:endParaRPr lang="en-US" sz="4000" dirty="0"/>
           </a:p>
@@ -8993,7 +9082,7 @@
                 <a:ea typeface="Calibri" pitchFamily="34" charset="-122"/>
                 <a:cs typeface="Calibri" pitchFamily="34" charset="-120"/>
               </a:rPr>
-              <a:t>1. ALTITUDE</a:t>
+              <a:t>2. ALTITUDE</a:t>
             </a:r>
             <a:endParaRPr lang="en-US" sz="1400" dirty="0"/>
           </a:p>
@@ -9095,7 +9184,7 @@
                 <a:ea typeface="Times New Roman" pitchFamily="34" charset="-122"/>
                 <a:cs typeface="Times New Roman" pitchFamily="34" charset="-120"/>
               </a:rPr>
-              <a:t>Mount Kilimanjaro, near the Equator, has snow on top.</a:t>
+              <a:t>Snow on Mount Kilimanjaro.</a:t>
             </a:r>
             <a:endParaRPr lang="en-US" sz="1800" dirty="0"/>
           </a:p>
@@ -9207,7 +9296,7 @@
                 <a:ea typeface="Calibri" pitchFamily="34" charset="-122"/>
                 <a:cs typeface="Calibri" pitchFamily="34" charset="-120"/>
               </a:rPr>
-              <a:t>1. ALTITUDE</a:t>
+              <a:t>2. ALTITUDE</a:t>
             </a:r>
             <a:endParaRPr lang="en-US" sz="1400" dirty="0"/>
           </a:p>
@@ -9426,7 +9515,7 @@
                 <a:ea typeface="Calibri" pitchFamily="34" charset="-122"/>
                 <a:cs typeface="Calibri" pitchFamily="34" charset="-120"/>
               </a:rPr>
-              <a:t>1. ALTITUDE</a:t>
+              <a:t>2. ALTITUDE</a:t>
             </a:r>
             <a:endParaRPr lang="en-US" sz="1400" dirty="0"/>
           </a:p>
@@ -9533,7 +9622,7 @@
                 <a:ea typeface="Times New Roman" pitchFamily="34" charset="-122"/>
                 <a:cs typeface="Times New Roman" pitchFamily="34" charset="-120"/>
               </a:rPr>
-              <a:t>It is very high. Temperature falls with height.</a:t>
+              <a:t>It is very high, and temperature falls with height.</a:t>
             </a:r>
             <a:endParaRPr lang="en-US" sz="4000" dirty="0"/>
           </a:p>
@@ -9645,7 +9734,7 @@
                 <a:ea typeface="Calibri" pitchFamily="34" charset="-122"/>
                 <a:cs typeface="Calibri" pitchFamily="34" charset="-120"/>
               </a:rPr>
-              <a:t>2. OTHER FACTORS</a:t>
+              <a:t>6. VEGETATION</a:t>
             </a:r>
             <a:endParaRPr lang="en-US" sz="1400" dirty="0"/>
           </a:p>
@@ -9747,7 +9836,7 @@
                 <a:ea typeface="Times New Roman" pitchFamily="34" charset="-122"/>
                 <a:cs typeface="Times New Roman" pitchFamily="34" charset="-120"/>
               </a:rPr>
-              <a:t>People and animals near a big shady tree.</a:t>
+              <a:t>Cattle under trees.</a:t>
             </a:r>
             <a:endParaRPr lang="en-US" sz="1800" dirty="0"/>
           </a:p>
@@ -9859,7 +9948,7 @@
                 <a:ea typeface="Calibri" pitchFamily="34" charset="-122"/>
                 <a:cs typeface="Calibri" pitchFamily="34" charset="-120"/>
               </a:rPr>
-              <a:t>2. OTHER FACTORS</a:t>
+              <a:t>6. VEGETATION</a:t>
             </a:r>
             <a:endParaRPr lang="en-US" sz="1400" dirty="0"/>
           </a:p>
@@ -10078,7 +10167,7 @@
                 <a:ea typeface="Calibri" pitchFamily="34" charset="-122"/>
                 <a:cs typeface="Calibri" pitchFamily="34" charset="-120"/>
               </a:rPr>
-              <a:t>2. OTHER FACTORS</a:t>
+              <a:t>6. VEGETATION</a:t>
             </a:r>
             <a:endParaRPr lang="en-US" sz="1400" dirty="0"/>
           </a:p>
@@ -10185,7 +10274,7 @@
                 <a:ea typeface="Times New Roman" pitchFamily="34" charset="-122"/>
                 <a:cs typeface="Times New Roman" pitchFamily="34" charset="-120"/>
               </a:rPr>
-              <a:t>The leaves stop the sun rays.</a:t>
+              <a:t>The leaves stop the Sun's rays and give shade.</a:t>
             </a:r>
             <a:endParaRPr lang="en-US" sz="4000" dirty="0"/>
           </a:p>
@@ -10579,7 +10668,7 @@
         <p:spPr>
           <a:xfrm>
             <a:off x="0" y="658368"/>
-            <a:ext cx="5120640" cy="5833872"/>
+            <a:ext cx="1463040" cy="5833872"/>
           </a:xfrm>
           <a:prstGeom prst="rect">
             <a:avLst/>
@@ -10594,8 +10683,8 @@
         </p:nvSpPr>
         <p:spPr>
           <a:xfrm>
-            <a:off x="5349240" y="1005840"/>
-            <a:ext cx="6522415" cy="731520"/>
+            <a:off x="1691640" y="1005840"/>
+            <a:ext cx="10180015" cy="731520"/>
           </a:xfrm>
           <a:prstGeom prst="rect">
             <a:avLst/>
@@ -10621,7 +10710,7 @@
                 <a:ea typeface="Times New Roman" pitchFamily="34" charset="-122"/>
                 <a:cs typeface="Times New Roman" pitchFamily="34" charset="-120"/>
               </a:rPr>
-              <a:t>1. Latitude and Altitude</a:t>
+              <a:t>DEFINITIONS</a:t>
             </a:r>
             <a:endParaRPr lang="en-US" sz="3600" dirty="0"/>
           </a:p>
@@ -10635,8 +10724,8 @@
         </p:nvSpPr>
         <p:spPr>
           <a:xfrm>
-            <a:off x="5349240" y="1783080"/>
-            <a:ext cx="6522415" cy="4663440"/>
+            <a:off x="1691640" y="1783080"/>
+            <a:ext cx="10180015" cy="4663440"/>
           </a:xfrm>
           <a:prstGeom prst="rect">
             <a:avLst/>
@@ -10663,7 +10752,7 @@
                 <a:ea typeface="Times New Roman" pitchFamily="34" charset="-122"/>
                 <a:cs typeface="Times New Roman" pitchFamily="34" charset="-120"/>
               </a:rPr>
-              <a:t>Latitude and altitude affect temperature as follows:</a:t>
+              <a:t>The key terms of this lesson are defined as follows:</a:t>
             </a:r>
             <a:endParaRPr lang="en-US" sz="4000" dirty="0"/>
           </a:p>
@@ -10683,7 +10772,7 @@
                 <a:ea typeface="Times New Roman" pitchFamily="34" charset="-122"/>
                 <a:cs typeface="Times New Roman" pitchFamily="34" charset="-120"/>
               </a:rPr>
-              <a:t>Latitude: </a:t>
+              <a:t>Factor of temperature: </a:t>
             </a:r>
             <a:pPr algn="l" indent="0" marL="0">
               <a:spcAft>
@@ -10700,7 +10789,44 @@
                 <a:ea typeface="Times New Roman" pitchFamily="34" charset="-122"/>
                 <a:cs typeface="Times New Roman" pitchFamily="34" charset="-120"/>
               </a:rPr>
-              <a:t>Places near the Equator receive direct rays and are hot, while places near the poles receive slanting rays and are cold.</a:t>
+              <a:t>It is anything that makes a place hotter or cooler than another place.</a:t>
+            </a:r>
+            <a:endParaRPr lang="en-US" sz="4000" dirty="0"/>
+          </a:p>
+          <a:p>
+            <a:pPr algn="l" indent="0" marL="0">
+              <a:spcAft>
+                <a:spcPts val="800"/>
+              </a:spcAft>
+              <a:buNone/>
+            </a:pPr>
+            <a:r>
+              <a:rPr lang="en-US" sz="4000" b="1" dirty="0">
+                <a:solidFill>
+                  <a:srgbClr val="111111"/>
+                </a:solidFill>
+                <a:latin typeface="Times New Roman" pitchFamily="34" charset="0"/>
+                <a:ea typeface="Times New Roman" pitchFamily="34" charset="-122"/>
+                <a:cs typeface="Times New Roman" pitchFamily="34" charset="-120"/>
+              </a:rPr>
+              <a:t>Lapse rate: </a:t>
+            </a:r>
+            <a:pPr algn="l" indent="0" marL="0">
+              <a:spcAft>
+                <a:spcPts val="800"/>
+              </a:spcAft>
+              <a:buNone/>
+            </a:pPr>
+            <a:r>
+              <a:rPr lang="en-US" sz="4000" dirty="0">
+                <a:solidFill>
+                  <a:srgbClr val="111111"/>
+                </a:solidFill>
+                <a:latin typeface="Times New Roman" pitchFamily="34" charset="0"/>
+                <a:ea typeface="Times New Roman" pitchFamily="34" charset="-122"/>
+                <a:cs typeface="Times New Roman" pitchFamily="34" charset="-120"/>
+              </a:rPr>
+              <a:t>It is the fall of temperature with height, about 6.5 °C every 1,000 m.</a:t>
             </a:r>
             <a:endParaRPr lang="en-US" sz="4000" dirty="0"/>
           </a:p>
@@ -11827,9 +11953,129 @@
           </a:p>
         </p:txBody>
       </p:sp>
+      <p:sp>
+        <p:nvSpPr>
+          <p:cNvPr id="3" name="Text 1"/>
+          <p:cNvSpPr/>
+          <p:nvPr/>
+        </p:nvSpPr>
+        <p:spPr>
+          <a:xfrm>
+            <a:off x="365760" y="1005840"/>
+            <a:ext cx="11460175" cy="731520"/>
+          </a:xfrm>
+          <a:prstGeom prst="rect">
+            <a:avLst/>
+          </a:prstGeom>
+          <a:noFill/>
+          <a:ln/>
+        </p:spPr>
+        <p:txBody>
+          <a:bodyPr wrap="square" lIns="0" tIns="0" rIns="0" bIns="0" rtlCol="0" anchor="ctr">
+            <a:normAutofit/>
+          </a:bodyPr>
+          <a:lstStyle/>
+          <a:p>
+            <a:pPr algn="ctr" indent="0" marL="0">
+              <a:buNone/>
+            </a:pPr>
+            <a:r>
+              <a:rPr lang="en-US" sz="3600" b="1" dirty="0">
+                <a:solidFill>
+                  <a:srgbClr val="990011"/>
+                </a:solidFill>
+                <a:latin typeface="Times New Roman" pitchFamily="34" charset="0"/>
+                <a:ea typeface="Times New Roman" pitchFamily="34" charset="-122"/>
+                <a:cs typeface="Times New Roman" pitchFamily="34" charset="-120"/>
+              </a:rPr>
+              <a:t>Factors of Temperature</a:t>
+            </a:r>
+            <a:endParaRPr lang="en-US" sz="3600" dirty="0"/>
+          </a:p>
+        </p:txBody>
+      </p:sp>
+      <p:sp>
+        <p:nvSpPr>
+          <p:cNvPr id="4" name="Text 2"/>
+          <p:cNvSpPr/>
+          <p:nvPr/>
+        </p:nvSpPr>
+        <p:spPr>
+          <a:xfrm>
+            <a:off x="365760" y="1783080"/>
+            <a:ext cx="4846320" cy="4617720"/>
+          </a:xfrm>
+          <a:prstGeom prst="rect">
+            <a:avLst/>
+          </a:prstGeom>
+          <a:noFill/>
+          <a:ln/>
+        </p:spPr>
+        <p:txBody>
+          <a:bodyPr wrap="square" lIns="0" tIns="0" rIns="0" bIns="0" rtlCol="0" anchor="t"/>
+          <a:lstStyle/>
+          <a:p>
+            <a:pPr algn="l" indent="0" marL="0">
+              <a:spcAft>
+                <a:spcPts val="800"/>
+              </a:spcAft>
+              <a:buNone/>
+            </a:pPr>
+            <a:r>
+              <a:rPr lang="en-US" sz="3200" i="1" dirty="0">
+                <a:solidFill>
+                  <a:srgbClr val="111111"/>
+                </a:solidFill>
+                <a:latin typeface="Times New Roman" pitchFamily="34" charset="0"/>
+                <a:ea typeface="Times New Roman" pitchFamily="34" charset="-122"/>
+                <a:cs typeface="Times New Roman" pitchFamily="34" charset="-120"/>
+              </a:rPr>
+              <a:t>Temperature is affected by the following factors:</a:t>
+            </a:r>
+            <a:endParaRPr lang="en-US" sz="3200" dirty="0"/>
+          </a:p>
+          <a:p>
+            <a:pPr algn="l" indent="0" marL="0">
+              <a:spcAft>
+                <a:spcPts val="800"/>
+              </a:spcAft>
+              <a:buNone/>
+            </a:pPr>
+            <a:r>
+              <a:rPr lang="en-US" sz="3200" b="1" dirty="0">
+                <a:solidFill>
+                  <a:srgbClr val="111111"/>
+                </a:solidFill>
+                <a:latin typeface="Times New Roman" pitchFamily="34" charset="0"/>
+                <a:ea typeface="Times New Roman" pitchFamily="34" charset="-122"/>
+                <a:cs typeface="Times New Roman" pitchFamily="34" charset="-120"/>
+              </a:rPr>
+              <a:t>1. Latitude: </a:t>
+            </a:r>
+            <a:pPr algn="l" indent="0" marL="0">
+              <a:spcAft>
+                <a:spcPts val="800"/>
+              </a:spcAft>
+              <a:buNone/>
+            </a:pPr>
+            <a:r>
+              <a:rPr lang="en-US" sz="3200" dirty="0">
+                <a:solidFill>
+                  <a:srgbClr val="111111"/>
+                </a:solidFill>
+                <a:latin typeface="Times New Roman" pitchFamily="34" charset="0"/>
+                <a:ea typeface="Times New Roman" pitchFamily="34" charset="-122"/>
+                <a:cs typeface="Times New Roman" pitchFamily="34" charset="-120"/>
+              </a:rPr>
+              <a:t>Near the Equator the Sun's rays are direct and hot, while towards the poles they are slanting and spread over a larger area.</a:t>
+            </a:r>
+            <a:endParaRPr lang="en-US" sz="3200" dirty="0"/>
+          </a:p>
+        </p:txBody>
+      </p:sp>
       <p:pic>
         <p:nvPicPr>
-          <p:cNvPr id="3" name="Image 0" descr="/home/claude/f4/img/minesec_sheet.png">    </p:cNvPr>
+          <p:cNvPr id="5" name="Image 0" descr="/home/claude/f4/img/v2/sun_rays_big.png">    </p:cNvPr>
           <p:cNvPicPr>
             <a:picLocks noChangeAspect="1"/>
           </p:cNvPicPr>
@@ -11843,8 +12089,8 @@
         </p:blipFill>
         <p:spPr>
           <a:xfrm>
-            <a:off x="0" y="658368"/>
-            <a:ext cx="5120640" cy="5833872"/>
+            <a:off x="5349240" y="2617506"/>
+            <a:ext cx="6659575" cy="2601397"/>
           </a:xfrm>
           <a:prstGeom prst="rect">
             <a:avLst/>
@@ -11853,14 +12099,14 @@
       </p:pic>
       <p:sp>
         <p:nvSpPr>
-          <p:cNvPr id="4" name="Text 1"/>
+          <p:cNvPr id="6" name="Text 3"/>
           <p:cNvSpPr/>
           <p:nvPr/>
         </p:nvSpPr>
         <p:spPr>
           <a:xfrm>
-            <a:off x="5349240" y="1005840"/>
-            <a:ext cx="6522415" cy="731520"/>
+            <a:off x="5349240" y="6089904"/>
+            <a:ext cx="6659575" cy="347472"/>
           </a:xfrm>
           <a:prstGeom prst="rect">
             <a:avLst/>
@@ -11869,85 +12115,24 @@
           <a:ln/>
         </p:spPr>
         <p:txBody>
-          <a:bodyPr wrap="square" lIns="0" tIns="0" rIns="0" bIns="0" rtlCol="0" anchor="ctr">
-            <a:normAutofit/>
-          </a:bodyPr>
+          <a:bodyPr wrap="square" lIns="0" tIns="0" rIns="0" bIns="0" rtlCol="0" anchor="ctr"/>
           <a:lstStyle/>
           <a:p>
             <a:pPr algn="ctr" indent="0" marL="0">
               <a:buNone/>
             </a:pPr>
             <a:r>
-              <a:rPr lang="en-US" sz="3600" b="1" dirty="0">
-                <a:solidFill>
-                  <a:srgbClr val="990011"/>
+              <a:rPr lang="en-US" sz="1600" i="1" dirty="0">
+                <a:solidFill>
+                  <a:srgbClr val="555555"/>
                 </a:solidFill>
                 <a:latin typeface="Times New Roman" pitchFamily="34" charset="0"/>
                 <a:ea typeface="Times New Roman" pitchFamily="34" charset="-122"/>
                 <a:cs typeface="Times New Roman" pitchFamily="34" charset="-120"/>
               </a:rPr>
-              <a:t>1. Latitude and Altitude (continued)</a:t>
-            </a:r>
-            <a:endParaRPr lang="en-US" sz="3600" dirty="0"/>
-          </a:p>
-        </p:txBody>
-      </p:sp>
-      <p:sp>
-        <p:nvSpPr>
-          <p:cNvPr id="5" name="Text 2"/>
-          <p:cNvSpPr/>
-          <p:nvPr/>
-        </p:nvSpPr>
-        <p:spPr>
-          <a:xfrm>
-            <a:off x="5349240" y="1783080"/>
-            <a:ext cx="6522415" cy="4663440"/>
-          </a:xfrm>
-          <a:prstGeom prst="rect">
-            <a:avLst/>
-          </a:prstGeom>
-          <a:noFill/>
-          <a:ln/>
-        </p:spPr>
-        <p:txBody>
-          <a:bodyPr wrap="square" lIns="0" tIns="0" rIns="0" bIns="0" rtlCol="0" anchor="t"/>
-          <a:lstStyle/>
-          <a:p>
-            <a:pPr algn="l" indent="0" marL="0">
-              <a:spcAft>
-                <a:spcPts val="800"/>
-              </a:spcAft>
-              <a:buNone/>
-            </a:pPr>
-            <a:r>
-              <a:rPr lang="en-US" sz="4000" b="1" dirty="0">
-                <a:solidFill>
-                  <a:srgbClr val="111111"/>
-                </a:solidFill>
-                <a:latin typeface="Times New Roman" pitchFamily="34" charset="0"/>
-                <a:ea typeface="Times New Roman" pitchFamily="34" charset="-122"/>
-                <a:cs typeface="Times New Roman" pitchFamily="34" charset="-120"/>
-              </a:rPr>
-              <a:t>Altitude: </a:t>
-            </a:r>
-            <a:pPr algn="l" indent="0" marL="0">
-              <a:spcAft>
-                <a:spcPts val="800"/>
-              </a:spcAft>
-              <a:buNone/>
-            </a:pPr>
-            <a:r>
-              <a:rPr lang="en-US" sz="4000" dirty="0">
-                <a:solidFill>
-                  <a:srgbClr val="111111"/>
-                </a:solidFill>
-                <a:latin typeface="Times New Roman" pitchFamily="34" charset="0"/>
-                <a:ea typeface="Times New Roman" pitchFamily="34" charset="-122"/>
-                <a:cs typeface="Times New Roman" pitchFamily="34" charset="-120"/>
-              </a:rPr>
-              <a:t>Temperature falls by about 6.5 °C for every 1,000 m of height.</a:t>
-            </a:r>
-            <a:endParaRPr lang="en-US" sz="4000" dirty="0"/>
+              <a:t>Illustration: the Sun's rays and latitude</a:t>
+            </a:r>
+            <a:endParaRPr lang="en-US" sz="1600" dirty="0"/>
           </a:p>
         </p:txBody>
       </p:sp>
@@ -12071,8 +12256,8 @@
         </p:nvSpPr>
         <p:spPr>
           <a:xfrm>
-            <a:off x="457200" y="1005840"/>
-            <a:ext cx="11277295" cy="731520"/>
+            <a:off x="365760" y="1005840"/>
+            <a:ext cx="11460175" cy="731520"/>
           </a:xfrm>
           <a:prstGeom prst="rect">
             <a:avLst/>
@@ -12081,7 +12266,9 @@
           <a:ln/>
         </p:spPr>
         <p:txBody>
-          <a:bodyPr wrap="square" lIns="0" tIns="0" rIns="0" bIns="0" rtlCol="0" anchor="ctr"/>
+          <a:bodyPr wrap="square" lIns="0" tIns="0" rIns="0" bIns="0" rtlCol="0" anchor="ctr">
+            <a:normAutofit/>
+          </a:bodyPr>
           <a:lstStyle/>
           <a:p>
             <a:pPr algn="ctr" indent="0" marL="0">
@@ -12096,7 +12283,66 @@
                 <a:ea typeface="Times New Roman" pitchFamily="34" charset="-122"/>
                 <a:cs typeface="Times New Roman" pitchFamily="34" charset="-120"/>
               </a:rPr>
-              <a:t>1. Latitude and Altitude</a:t>
+              <a:t>Factors of Temperature</a:t>
+            </a:r>
+            <a:endParaRPr lang="en-US" sz="3600" dirty="0"/>
+          </a:p>
+        </p:txBody>
+      </p:sp>
+      <p:sp>
+        <p:nvSpPr>
+          <p:cNvPr id="4" name="Text 2"/>
+          <p:cNvSpPr/>
+          <p:nvPr/>
+        </p:nvSpPr>
+        <p:spPr>
+          <a:xfrm>
+            <a:off x="365760" y="1783080"/>
+            <a:ext cx="4846320" cy="4617720"/>
+          </a:xfrm>
+          <a:prstGeom prst="rect">
+            <a:avLst/>
+          </a:prstGeom>
+          <a:noFill/>
+          <a:ln/>
+        </p:spPr>
+        <p:txBody>
+          <a:bodyPr wrap="square" lIns="0" tIns="0" rIns="0" bIns="0" rtlCol="0" anchor="t"/>
+          <a:lstStyle/>
+          <a:p>
+            <a:pPr algn="l" indent="0" marL="0">
+              <a:spcAft>
+                <a:spcPts val="800"/>
+              </a:spcAft>
+              <a:buNone/>
+            </a:pPr>
+            <a:r>
+              <a:rPr lang="en-US" sz="3600" b="1" dirty="0">
+                <a:solidFill>
+                  <a:srgbClr val="111111"/>
+                </a:solidFill>
+                <a:latin typeface="Times New Roman" pitchFamily="34" charset="0"/>
+                <a:ea typeface="Times New Roman" pitchFamily="34" charset="-122"/>
+                <a:cs typeface="Times New Roman" pitchFamily="34" charset="-120"/>
+              </a:rPr>
+              <a:t>2. Altitude: </a:t>
+            </a:r>
+            <a:pPr algn="l" indent="0" marL="0">
+              <a:spcAft>
+                <a:spcPts val="800"/>
+              </a:spcAft>
+              <a:buNone/>
+            </a:pPr>
+            <a:r>
+              <a:rPr lang="en-US" sz="3600" dirty="0">
+                <a:solidFill>
+                  <a:srgbClr val="111111"/>
+                </a:solidFill>
+                <a:latin typeface="Times New Roman" pitchFamily="34" charset="0"/>
+                <a:ea typeface="Times New Roman" pitchFamily="34" charset="-122"/>
+                <a:cs typeface="Times New Roman" pitchFamily="34" charset="-120"/>
+              </a:rPr>
+              <a:t>Temperature falls by about 6.5 °C for every 1,000 m of height, so Ngaoundéré is cooler than Garoua.</a:t>
             </a:r>
             <a:endParaRPr lang="en-US" sz="3600" dirty="0"/>
           </a:p>
@@ -12104,7 +12350,7 @@
       </p:sp>
       <p:pic>
         <p:nvPicPr>
-          <p:cNvPr id="4" name="Image 0" descr="/home/claude/f4/img/v2/sun_rays_big.png">    </p:cNvPr>
+          <p:cNvPr id="5" name="Image 0" descr="/home/claude/f4/img/v2/lapse_rate_big.png">    </p:cNvPr>
           <p:cNvPicPr>
             <a:picLocks noChangeAspect="1"/>
           </p:cNvPicPr>
@@ -12118,8 +12364,8 @@
         </p:blipFill>
         <p:spPr>
           <a:xfrm>
-            <a:off x="629930" y="1783080"/>
-            <a:ext cx="10931835" cy="4270248"/>
+            <a:off x="5349240" y="2617506"/>
+            <a:ext cx="6659575" cy="2601397"/>
           </a:xfrm>
           <a:prstGeom prst="rect">
             <a:avLst/>
@@ -12128,14 +12374,14 @@
       </p:pic>
       <p:sp>
         <p:nvSpPr>
-          <p:cNvPr id="5" name="Text 2"/>
+          <p:cNvPr id="6" name="Text 3"/>
           <p:cNvSpPr/>
           <p:nvPr/>
         </p:nvSpPr>
         <p:spPr>
           <a:xfrm>
-            <a:off x="457200" y="6089904"/>
-            <a:ext cx="11277295" cy="347472"/>
+            <a:off x="5349240" y="6089904"/>
+            <a:ext cx="6659575" cy="347472"/>
           </a:xfrm>
           <a:prstGeom prst="rect">
             <a:avLst/>
@@ -12151,7 +12397,7 @@
               <a:buNone/>
             </a:pPr>
             <a:r>
-              <a:rPr lang="en-US" sz="1800" i="1" dirty="0">
+              <a:rPr lang="en-US" sz="1600" i="1" dirty="0">
                 <a:solidFill>
                   <a:srgbClr val="555555"/>
                 </a:solidFill>
@@ -12159,9 +12405,9 @@
                 <a:ea typeface="Times New Roman" pitchFamily="34" charset="-122"/>
                 <a:cs typeface="Times New Roman" pitchFamily="34" charset="-120"/>
               </a:rPr>
-              <a:t>Illustration: the Sun's rays and latitude</a:t>
-            </a:r>
-            <a:endParaRPr lang="en-US" sz="1800" dirty="0"/>
+              <a:t>Illustration: temperature and altitude</a:t>
+            </a:r>
+            <a:endParaRPr lang="en-US" sz="1600" dirty="0"/>
           </a:p>
         </p:txBody>
       </p:sp>
@@ -12294,7 +12540,7 @@
         <p:spPr>
           <a:xfrm>
             <a:off x="0" y="658368"/>
-            <a:ext cx="1463040" cy="5833872"/>
+            <a:ext cx="2468880" cy="5833872"/>
           </a:xfrm>
           <a:prstGeom prst="rect">
             <a:avLst/>
@@ -12309,8 +12555,8 @@
         </p:nvSpPr>
         <p:spPr>
           <a:xfrm>
-            <a:off x="1691640" y="1005840"/>
-            <a:ext cx="10180015" cy="731520"/>
+            <a:off x="2697480" y="1005840"/>
+            <a:ext cx="9174175" cy="731520"/>
           </a:xfrm>
           <a:prstGeom prst="rect">
             <a:avLst/>
@@ -12336,7 +12582,7 @@
                 <a:ea typeface="Times New Roman" pitchFamily="34" charset="-122"/>
                 <a:cs typeface="Times New Roman" pitchFamily="34" charset="-120"/>
               </a:rPr>
-              <a:t>2. Other Factors of Temperature</a:t>
+              <a:t>Factors of Temperature</a:t>
             </a:r>
             <a:endParaRPr lang="en-US" sz="3600" dirty="0"/>
           </a:p>
@@ -12350,8 +12596,8 @@
         </p:nvSpPr>
         <p:spPr>
           <a:xfrm>
-            <a:off x="1691640" y="1783080"/>
-            <a:ext cx="10180015" cy="4663440"/>
+            <a:off x="2697480" y="1783080"/>
+            <a:ext cx="9174175" cy="4663440"/>
           </a:xfrm>
           <a:prstGeom prst="rect">
             <a:avLst/>
@@ -12370,7 +12616,7 @@
               <a:buNone/>
             </a:pPr>
             <a:r>
-              <a:rPr lang="en-US" sz="4000" i="1" dirty="0">
+              <a:rPr lang="en-US" sz="4000" b="1" dirty="0">
                 <a:solidFill>
                   <a:srgbClr val="111111"/>
                 </a:solidFill>
@@ -12378,11 +12624,8 @@
                 <a:ea typeface="Times New Roman" pitchFamily="34" charset="-122"/>
                 <a:cs typeface="Times New Roman" pitchFamily="34" charset="-120"/>
               </a:rPr>
-              <a:t>Temperature is also affected by the following factors:</a:t>
-            </a:r>
-            <a:endParaRPr lang="en-US" sz="4000" dirty="0"/>
-          </a:p>
-          <a:p>
+              <a:t>3. Cloud cover: </a:t>
+            </a:r>
             <a:pPr algn="l" indent="0" marL="0">
               <a:spcAft>
                 <a:spcPts val="800"/>
@@ -12390,7 +12633,7 @@
               <a:buNone/>
             </a:pPr>
             <a:r>
-              <a:rPr lang="en-US" sz="4000" b="1" dirty="0">
+              <a:rPr lang="en-US" sz="4000" dirty="0">
                 <a:solidFill>
                   <a:srgbClr val="111111"/>
                 </a:solidFill>
@@ -12398,8 +12641,11 @@
                 <a:ea typeface="Times New Roman" pitchFamily="34" charset="-122"/>
                 <a:cs typeface="Times New Roman" pitchFamily="34" charset="-120"/>
               </a:rPr>
-              <a:t>Cloud cover: </a:t>
-            </a:r>
+              <a:t>Clouds keep out the Sun by day and keep in the heat at night, so cloudy places have a small range.</a:t>
+            </a:r>
+            <a:endParaRPr lang="en-US" sz="4000" dirty="0"/>
+          </a:p>
+          <a:p>
             <a:pPr algn="l" indent="0" marL="0">
               <a:spcAft>
                 <a:spcPts val="800"/>
@@ -12407,7 +12653,7 @@
               <a:buNone/>
             </a:pPr>
             <a:r>
-              <a:rPr lang="en-US" sz="4000" dirty="0">
+              <a:rPr lang="en-US" sz="4000" b="1" dirty="0">
                 <a:solidFill>
                   <a:srgbClr val="111111"/>
                 </a:solidFill>
@@ -12415,11 +12661,8 @@
                 <a:ea typeface="Times New Roman" pitchFamily="34" charset="-122"/>
                 <a:cs typeface="Times New Roman" pitchFamily="34" charset="-120"/>
               </a:rPr>
-              <a:t>Clouds make days cooler and nights warmer.</a:t>
-            </a:r>
-            <a:endParaRPr lang="en-US" sz="4000" dirty="0"/>
-          </a:p>
-          <a:p>
+              <a:t>4. Air masses and winds: </a:t>
+            </a:r>
             <a:pPr algn="l" indent="0" marL="0">
               <a:spcAft>
                 <a:spcPts val="800"/>
@@ -12427,7 +12670,7 @@
               <a:buNone/>
             </a:pPr>
             <a:r>
-              <a:rPr lang="en-US" sz="4000" b="1" dirty="0">
+              <a:rPr lang="en-US" sz="4000" dirty="0">
                 <a:solidFill>
                   <a:srgbClr val="111111"/>
                 </a:solidFill>
@@ -12435,24 +12678,7 @@
                 <a:ea typeface="Times New Roman" pitchFamily="34" charset="-122"/>
                 <a:cs typeface="Times New Roman" pitchFamily="34" charset="-120"/>
               </a:rPr>
-              <a:t>Air masses and winds: </a:t>
-            </a:r>
-            <a:pPr algn="l" indent="0" marL="0">
-              <a:spcAft>
-                <a:spcPts val="800"/>
-              </a:spcAft>
-              <a:buNone/>
-            </a:pPr>
-            <a:r>
-              <a:rPr lang="en-US" sz="4000" dirty="0">
-                <a:solidFill>
-                  <a:srgbClr val="111111"/>
-                </a:solidFill>
-                <a:latin typeface="Times New Roman" pitchFamily="34" charset="0"/>
-                <a:ea typeface="Times New Roman" pitchFamily="34" charset="-122"/>
-                <a:cs typeface="Times New Roman" pitchFamily="34" charset="-120"/>
-              </a:rPr>
-              <a:t>Winds bring the temperature of the places they come from, like the dry and cool Harmattan nights.</a:t>
+              <a:t>Winds bring the temperature of the places they come from, like the dry, cool Harmattan nights.</a:t>
             </a:r>
             <a:endParaRPr lang="en-US" sz="4000" dirty="0"/>
           </a:p>
@@ -12570,9 +12796,109 @@
           </a:p>
         </p:txBody>
       </p:sp>
+      <p:sp>
+        <p:nvSpPr>
+          <p:cNvPr id="3" name="Text 1"/>
+          <p:cNvSpPr/>
+          <p:nvPr/>
+        </p:nvSpPr>
+        <p:spPr>
+          <a:xfrm>
+            <a:off x="365760" y="1005840"/>
+            <a:ext cx="11460175" cy="731520"/>
+          </a:xfrm>
+          <a:prstGeom prst="rect">
+            <a:avLst/>
+          </a:prstGeom>
+          <a:noFill/>
+          <a:ln/>
+        </p:spPr>
+        <p:txBody>
+          <a:bodyPr wrap="square" lIns="0" tIns="0" rIns="0" bIns="0" rtlCol="0" anchor="ctr">
+            <a:normAutofit/>
+          </a:bodyPr>
+          <a:lstStyle/>
+          <a:p>
+            <a:pPr algn="ctr" indent="0" marL="0">
+              <a:buNone/>
+            </a:pPr>
+            <a:r>
+              <a:rPr lang="en-US" sz="3600" b="1" dirty="0">
+                <a:solidFill>
+                  <a:srgbClr val="990011"/>
+                </a:solidFill>
+                <a:latin typeface="Times New Roman" pitchFamily="34" charset="0"/>
+                <a:ea typeface="Times New Roman" pitchFamily="34" charset="-122"/>
+                <a:cs typeface="Times New Roman" pitchFamily="34" charset="-120"/>
+              </a:rPr>
+              <a:t>Factors of Temperature</a:t>
+            </a:r>
+            <a:endParaRPr lang="en-US" sz="3600" dirty="0"/>
+          </a:p>
+        </p:txBody>
+      </p:sp>
+      <p:sp>
+        <p:nvSpPr>
+          <p:cNvPr id="4" name="Text 2"/>
+          <p:cNvSpPr/>
+          <p:nvPr/>
+        </p:nvSpPr>
+        <p:spPr>
+          <a:xfrm>
+            <a:off x="365760" y="1783080"/>
+            <a:ext cx="4846320" cy="4617720"/>
+          </a:xfrm>
+          <a:prstGeom prst="rect">
+            <a:avLst/>
+          </a:prstGeom>
+          <a:noFill/>
+          <a:ln/>
+        </p:spPr>
+        <p:txBody>
+          <a:bodyPr wrap="square" lIns="0" tIns="0" rIns="0" bIns="0" rtlCol="0" anchor="t"/>
+          <a:lstStyle/>
+          <a:p>
+            <a:pPr algn="l" indent="0" marL="0">
+              <a:spcAft>
+                <a:spcPts val="800"/>
+              </a:spcAft>
+              <a:buNone/>
+            </a:pPr>
+            <a:r>
+              <a:rPr lang="en-US" sz="3600" b="1" dirty="0">
+                <a:solidFill>
+                  <a:srgbClr val="111111"/>
+                </a:solidFill>
+                <a:latin typeface="Times New Roman" pitchFamily="34" charset="0"/>
+                <a:ea typeface="Times New Roman" pitchFamily="34" charset="-122"/>
+                <a:cs typeface="Times New Roman" pitchFamily="34" charset="-120"/>
+              </a:rPr>
+              <a:t>5. Ocean currents and distance from the sea: </a:t>
+            </a:r>
+            <a:pPr algn="l" indent="0" marL="0">
+              <a:spcAft>
+                <a:spcPts val="800"/>
+              </a:spcAft>
+              <a:buNone/>
+            </a:pPr>
+            <a:r>
+              <a:rPr lang="en-US" sz="3600" dirty="0">
+                <a:solidFill>
+                  <a:srgbClr val="111111"/>
+                </a:solidFill>
+                <a:latin typeface="Times New Roman" pitchFamily="34" charset="0"/>
+                <a:ea typeface="Times New Roman" pitchFamily="34" charset="-122"/>
+                <a:cs typeface="Times New Roman" pitchFamily="34" charset="-120"/>
+              </a:rPr>
+              <a:t>Warm currents warm coasts and cold currents cool them, while the sea keeps coastal towns like Douala mild.</a:t>
+            </a:r>
+            <a:endParaRPr lang="en-US" sz="3600" dirty="0"/>
+          </a:p>
+        </p:txBody>
+      </p:sp>
       <p:pic>
         <p:nvPicPr>
-          <p:cNvPr id="3" name="Image 0" descr="/home/claude/f4/img/minesec_sheet.png">    </p:cNvPr>
+          <p:cNvPr id="5" name="Image 0" descr="/home/claude/f4/img/v2/ocean_currents_big.png">    </p:cNvPr>
           <p:cNvPicPr>
             <a:picLocks noChangeAspect="1"/>
           </p:cNvPicPr>
@@ -12586,8 +12912,8 @@
         </p:blipFill>
         <p:spPr>
           <a:xfrm>
-            <a:off x="0" y="658368"/>
-            <a:ext cx="2468880" cy="5833872"/>
+            <a:off x="5349240" y="2253310"/>
+            <a:ext cx="6659575" cy="3329788"/>
           </a:xfrm>
           <a:prstGeom prst="rect">
             <a:avLst/>
@@ -12596,14 +12922,14 @@
       </p:pic>
       <p:sp>
         <p:nvSpPr>
-          <p:cNvPr id="4" name="Text 1"/>
+          <p:cNvPr id="6" name="Text 3"/>
           <p:cNvSpPr/>
           <p:nvPr/>
         </p:nvSpPr>
         <p:spPr>
           <a:xfrm>
-            <a:off x="2697480" y="1005840"/>
-            <a:ext cx="9174175" cy="731520"/>
+            <a:off x="5349240" y="6089904"/>
+            <a:ext cx="6659575" cy="347472"/>
           </a:xfrm>
           <a:prstGeom prst="rect">
             <a:avLst/>
@@ -12612,122 +12938,24 @@
           <a:ln/>
         </p:spPr>
         <p:txBody>
-          <a:bodyPr wrap="square" lIns="0" tIns="0" rIns="0" bIns="0" rtlCol="0" anchor="ctr">
-            <a:normAutofit/>
-          </a:bodyPr>
+          <a:bodyPr wrap="square" lIns="0" tIns="0" rIns="0" bIns="0" rtlCol="0" anchor="ctr"/>
           <a:lstStyle/>
           <a:p>
             <a:pPr algn="ctr" indent="0" marL="0">
               <a:buNone/>
             </a:pPr>
             <a:r>
-              <a:rPr lang="en-US" sz="3600" b="1" dirty="0">
-                <a:solidFill>
-                  <a:srgbClr val="990011"/>
+              <a:rPr lang="en-US" sz="1600" i="1" dirty="0">
+                <a:solidFill>
+                  <a:srgbClr val="555555"/>
                 </a:solidFill>
                 <a:latin typeface="Times New Roman" pitchFamily="34" charset="0"/>
                 <a:ea typeface="Times New Roman" pitchFamily="34" charset="-122"/>
                 <a:cs typeface="Times New Roman" pitchFamily="34" charset="-120"/>
               </a:rPr>
-              <a:t>2. Other Factors of Temperature (continued)</a:t>
-            </a:r>
-            <a:endParaRPr lang="en-US" sz="3600" dirty="0"/>
-          </a:p>
-        </p:txBody>
-      </p:sp>
-      <p:sp>
-        <p:nvSpPr>
-          <p:cNvPr id="5" name="Text 2"/>
-          <p:cNvSpPr/>
-          <p:nvPr/>
-        </p:nvSpPr>
-        <p:spPr>
-          <a:xfrm>
-            <a:off x="2697480" y="1783080"/>
-            <a:ext cx="9174175" cy="4663440"/>
-          </a:xfrm>
-          <a:prstGeom prst="rect">
-            <a:avLst/>
-          </a:prstGeom>
-          <a:noFill/>
-          <a:ln/>
-        </p:spPr>
-        <p:txBody>
-          <a:bodyPr wrap="square" lIns="0" tIns="0" rIns="0" bIns="0" rtlCol="0" anchor="t"/>
-          <a:lstStyle/>
-          <a:p>
-            <a:pPr algn="l" indent="0" marL="0">
-              <a:spcAft>
-                <a:spcPts val="800"/>
-              </a:spcAft>
-              <a:buNone/>
-            </a:pPr>
-            <a:r>
-              <a:rPr lang="en-US" sz="4000" b="1" dirty="0">
-                <a:solidFill>
-                  <a:srgbClr val="111111"/>
-                </a:solidFill>
-                <a:latin typeface="Times New Roman" pitchFamily="34" charset="0"/>
-                <a:ea typeface="Times New Roman" pitchFamily="34" charset="-122"/>
-                <a:cs typeface="Times New Roman" pitchFamily="34" charset="-120"/>
-              </a:rPr>
-              <a:t>Distance from the sea and ocean currents: </a:t>
-            </a:r>
-            <a:pPr algn="l" indent="0" marL="0">
-              <a:spcAft>
-                <a:spcPts val="800"/>
-              </a:spcAft>
-              <a:buNone/>
-            </a:pPr>
-            <a:r>
-              <a:rPr lang="en-US" sz="4000" dirty="0">
-                <a:solidFill>
-                  <a:srgbClr val="111111"/>
-                </a:solidFill>
-                <a:latin typeface="Times New Roman" pitchFamily="34" charset="0"/>
-                <a:ea typeface="Times New Roman" pitchFamily="34" charset="-122"/>
-                <a:cs typeface="Times New Roman" pitchFamily="34" charset="-120"/>
-              </a:rPr>
-              <a:t>The sea keeps coastal towns like Douala mild with a small range, and cold currents cool coasts.</a:t>
-            </a:r>
-            <a:endParaRPr lang="en-US" sz="4000" dirty="0"/>
-          </a:p>
-          <a:p>
-            <a:pPr algn="l" indent="0" marL="0">
-              <a:spcAft>
-                <a:spcPts val="800"/>
-              </a:spcAft>
-              <a:buNone/>
-            </a:pPr>
-            <a:r>
-              <a:rPr lang="en-US" sz="4000" b="1" dirty="0">
-                <a:solidFill>
-                  <a:srgbClr val="111111"/>
-                </a:solidFill>
-                <a:latin typeface="Times New Roman" pitchFamily="34" charset="0"/>
-                <a:ea typeface="Times New Roman" pitchFamily="34" charset="-122"/>
-                <a:cs typeface="Times New Roman" pitchFamily="34" charset="-120"/>
-              </a:rPr>
-              <a:t>Vegetation and human activities: </a:t>
-            </a:r>
-            <a:pPr algn="l" indent="0" marL="0">
-              <a:spcAft>
-                <a:spcPts val="800"/>
-              </a:spcAft>
-              <a:buNone/>
-            </a:pPr>
-            <a:r>
-              <a:rPr lang="en-US" sz="4000" dirty="0">
-                <a:solidFill>
-                  <a:srgbClr val="111111"/>
-                </a:solidFill>
-                <a:latin typeface="Times New Roman" pitchFamily="34" charset="0"/>
-                <a:ea typeface="Times New Roman" pitchFamily="34" charset="-122"/>
-                <a:cs typeface="Times New Roman" pitchFamily="34" charset="-120"/>
-              </a:rPr>
-              <a:t>Trees cool the air, while towns with concrete and cars are hotter.</a:t>
-            </a:r>
-            <a:endParaRPr lang="en-US" sz="4000" dirty="0"/>
+              <a:t>Illustration: ocean currents</a:t>
+            </a:r>
+            <a:endParaRPr lang="en-US" sz="1600" dirty="0"/>
           </a:p>
         </p:txBody>
       </p:sp>
@@ -12837,7 +13065,7 @@
                 <a:ea typeface="Calibri" pitchFamily="34" charset="-122"/>
                 <a:cs typeface="Calibri" pitchFamily="34" charset="-120"/>
               </a:rPr>
-              <a:t>FORMATIVE EVALUATION</a:t>
+              <a:t>BOARD SUMMARY</a:t>
             </a:r>
             <a:endParaRPr lang="en-US" sz="1400" dirty="0"/>
           </a:p>
@@ -12902,7 +13130,7 @@
                 <a:ea typeface="Times New Roman" pitchFamily="34" charset="-122"/>
                 <a:cs typeface="Times New Roman" pitchFamily="34" charset="-120"/>
               </a:rPr>
-              <a:t>Evaluation 1</a:t>
+              <a:t>Factors of Temperature</a:t>
             </a:r>
             <a:endParaRPr lang="en-US" sz="3600" dirty="0"/>
           </a:p>
@@ -12936,7 +13164,7 @@
               <a:buNone/>
             </a:pPr>
             <a:r>
-              <a:rPr lang="en-US" sz="4000" dirty="0">
+              <a:rPr lang="en-US" sz="4000" b="1" dirty="0">
                 <a:solidFill>
                   <a:srgbClr val="111111"/>
                 </a:solidFill>
@@ -12944,7 +13172,61 @@
                 <a:ea typeface="Times New Roman" pitchFamily="34" charset="-122"/>
                 <a:cs typeface="Times New Roman" pitchFamily="34" charset="-120"/>
               </a:rPr>
-              <a:t>Why is Ngaoundéré cooler than Garoua?</a:t>
+              <a:t>6. Vegetation: </a:t>
+            </a:r>
+            <a:pPr algn="l" indent="0" marL="0">
+              <a:spcAft>
+                <a:spcPts val="800"/>
+              </a:spcAft>
+              <a:buNone/>
+            </a:pPr>
+            <a:r>
+              <a:rPr lang="en-US" sz="4000" dirty="0">
+                <a:solidFill>
+                  <a:srgbClr val="111111"/>
+                </a:solidFill>
+                <a:latin typeface="Times New Roman" pitchFamily="34" charset="0"/>
+                <a:ea typeface="Times New Roman" pitchFamily="34" charset="-122"/>
+                <a:cs typeface="Times New Roman" pitchFamily="34" charset="-120"/>
+              </a:rPr>
+              <a:t>Forests and trees shade the ground and cool the air.</a:t>
+            </a:r>
+            <a:endParaRPr lang="en-US" sz="4000" dirty="0"/>
+          </a:p>
+          <a:p>
+            <a:pPr algn="l" indent="0" marL="0">
+              <a:spcAft>
+                <a:spcPts val="800"/>
+              </a:spcAft>
+              <a:buNone/>
+            </a:pPr>
+            <a:r>
+              <a:rPr lang="en-US" sz="4000" b="1" dirty="0">
+                <a:solidFill>
+                  <a:srgbClr val="111111"/>
+                </a:solidFill>
+                <a:latin typeface="Times New Roman" pitchFamily="34" charset="0"/>
+                <a:ea typeface="Times New Roman" pitchFamily="34" charset="-122"/>
+                <a:cs typeface="Times New Roman" pitchFamily="34" charset="-120"/>
+              </a:rPr>
+              <a:t>7. Human activities: </a:t>
+            </a:r>
+            <a:pPr algn="l" indent="0" marL="0">
+              <a:spcAft>
+                <a:spcPts val="800"/>
+              </a:spcAft>
+              <a:buNone/>
+            </a:pPr>
+            <a:r>
+              <a:rPr lang="en-US" sz="4000" dirty="0">
+                <a:solidFill>
+                  <a:srgbClr val="111111"/>
+                </a:solidFill>
+                <a:latin typeface="Times New Roman" pitchFamily="34" charset="0"/>
+                <a:ea typeface="Times New Roman" pitchFamily="34" charset="-122"/>
+                <a:cs typeface="Times New Roman" pitchFamily="34" charset="-120"/>
+              </a:rPr>
+              <a:t>Towns with concrete, tar, factories and cars are hotter than the countryside.</a:t>
             </a:r>
             <a:endParaRPr lang="en-US" sz="4000" dirty="0"/>
           </a:p>
@@ -13121,7 +13403,7 @@
                 <a:ea typeface="Times New Roman" pitchFamily="34" charset="-122"/>
                 <a:cs typeface="Times New Roman" pitchFamily="34" charset="-120"/>
               </a:rPr>
-              <a:t>Expected Answer</a:t>
+              <a:t>Evaluation 1</a:t>
             </a:r>
             <a:endParaRPr lang="en-US" sz="3600" dirty="0"/>
           </a:p>
@@ -13163,7 +13445,7 @@
                 <a:ea typeface="Times New Roman" pitchFamily="34" charset="-122"/>
                 <a:cs typeface="Times New Roman" pitchFamily="34" charset="-120"/>
               </a:rPr>
-              <a:t>It is higher (altitude).</a:t>
+              <a:t>Why is Ngaoundéré cooler than Garoua?</a:t>
             </a:r>
             <a:endParaRPr lang="en-US" sz="4000" dirty="0"/>
           </a:p>
@@ -13340,7 +13622,7 @@
                 <a:ea typeface="Times New Roman" pitchFamily="34" charset="-122"/>
                 <a:cs typeface="Times New Roman" pitchFamily="34" charset="-120"/>
               </a:rPr>
-              <a:t>Evaluation 2</a:t>
+              <a:t>Expected Answer</a:t>
             </a:r>
             <a:endParaRPr lang="en-US" sz="3600" dirty="0"/>
           </a:p>
@@ -13382,7 +13664,7 @@
                 <a:ea typeface="Times New Roman" pitchFamily="34" charset="-122"/>
                 <a:cs typeface="Times New Roman" pitchFamily="34" charset="-120"/>
               </a:rPr>
-              <a:t>Why is Douala's temperature range small?</a:t>
+              <a:t>It is higher (altitude).</a:t>
             </a:r>
             <a:endParaRPr lang="en-US" sz="4000" dirty="0"/>
           </a:p>
@@ -13559,7 +13841,7 @@
                 <a:ea typeface="Times New Roman" pitchFamily="34" charset="-122"/>
                 <a:cs typeface="Times New Roman" pitchFamily="34" charset="-120"/>
               </a:rPr>
-              <a:t>Expected Answer</a:t>
+              <a:t>Evaluation 2</a:t>
             </a:r>
             <a:endParaRPr lang="en-US" sz="3600" dirty="0"/>
           </a:p>
@@ -13601,7 +13883,7 @@
                 <a:ea typeface="Times New Roman" pitchFamily="34" charset="-122"/>
                 <a:cs typeface="Times New Roman" pitchFamily="34" charset="-120"/>
               </a:rPr>
-              <a:t>It is near the sea.</a:t>
+              <a:t>Why is Douala's temperature range small?</a:t>
             </a:r>
             <a:endParaRPr lang="en-US" sz="4000" dirty="0"/>
           </a:p>
@@ -13713,7 +13995,7 @@
                 <a:ea typeface="Calibri" pitchFamily="34" charset="-122"/>
                 <a:cs typeface="Calibri" pitchFamily="34" charset="-120"/>
               </a:rPr>
-              <a:t>REMEDIATION</a:t>
+              <a:t>FORMATIVE EVALUATION</a:t>
             </a:r>
             <a:endParaRPr lang="en-US" sz="1400" dirty="0"/>
           </a:p>
@@ -13736,7 +14018,7 @@
         <p:spPr>
           <a:xfrm>
             <a:off x="0" y="658368"/>
-            <a:ext cx="1463040" cy="5833872"/>
+            <a:ext cx="5120640" cy="5833872"/>
           </a:xfrm>
           <a:prstGeom prst="rect">
             <a:avLst/>
@@ -13751,8 +14033,8 @@
         </p:nvSpPr>
         <p:spPr>
           <a:xfrm>
-            <a:off x="1691640" y="1005840"/>
-            <a:ext cx="10180015" cy="731520"/>
+            <a:off x="5349240" y="1005840"/>
+            <a:ext cx="6522415" cy="731520"/>
           </a:xfrm>
           <a:prstGeom prst="rect">
             <a:avLst/>
@@ -13778,7 +14060,7 @@
                 <a:ea typeface="Times New Roman" pitchFamily="34" charset="-122"/>
                 <a:cs typeface="Times New Roman" pitchFamily="34" charset="-120"/>
               </a:rPr>
-              <a:t>Remediation</a:t>
+              <a:t>Expected Answer</a:t>
             </a:r>
             <a:endParaRPr lang="en-US" sz="3600" dirty="0"/>
           </a:p>
@@ -13792,8 +14074,8 @@
         </p:nvSpPr>
         <p:spPr>
           <a:xfrm>
-            <a:off x="1691640" y="1783080"/>
-            <a:ext cx="10180015" cy="4663440"/>
+            <a:off x="5349240" y="1783080"/>
+            <a:ext cx="6522415" cy="4663440"/>
           </a:xfrm>
           <a:prstGeom prst="rect">
             <a:avLst/>
@@ -13812,7 +14094,7 @@
               <a:buNone/>
             </a:pPr>
             <a:r>
-              <a:rPr lang="en-US" sz="4000" b="1" dirty="0">
+              <a:rPr lang="en-US" sz="4000" dirty="0">
                 <a:solidFill>
                   <a:srgbClr val="111111"/>
                 </a:solidFill>
@@ -13820,73 +14102,7 @@
                 <a:ea typeface="Times New Roman" pitchFamily="34" charset="-122"/>
                 <a:cs typeface="Times New Roman" pitchFamily="34" charset="-120"/>
               </a:rPr>
-              <a:t>Fill in the blanks:</a:t>
-            </a:r>
-            <a:endParaRPr lang="en-US" sz="4000" dirty="0"/>
-          </a:p>
-          <a:p>
-            <a:pPr algn="l" marL="342900" indent="-342900">
-              <a:spcAft>
-                <a:spcPts val="800"/>
-              </a:spcAft>
-              <a:buSzPct val="100000"/>
-              <a:buFont typeface="+mj-lt"/>
-              <a:buAutoNum type="arabicPeriod" startAt="1"/>
-            </a:pPr>
-            <a:r>
-              <a:rPr lang="en-US" sz="4000" dirty="0">
-                <a:solidFill>
-                  <a:srgbClr val="111111"/>
-                </a:solidFill>
-                <a:latin typeface="Times New Roman" pitchFamily="34" charset="0"/>
-                <a:ea typeface="Times New Roman" pitchFamily="34" charset="-122"/>
-                <a:cs typeface="Times New Roman" pitchFamily="34" charset="-120"/>
-              </a:rPr>
-              <a:t>Temperature falls when ______ increases.</a:t>
-            </a:r>
-            <a:endParaRPr lang="en-US" sz="4000" dirty="0"/>
-          </a:p>
-          <a:p>
-            <a:pPr algn="l" marL="342900" indent="-342900">
-              <a:spcAft>
-                <a:spcPts val="800"/>
-              </a:spcAft>
-              <a:buSzPct val="100000"/>
-              <a:buFont typeface="+mj-lt"/>
-              <a:buAutoNum type="arabicPeriod" startAt="1"/>
-            </a:pPr>
-            <a:r>
-              <a:rPr lang="en-US" sz="4000" dirty="0">
-                <a:solidFill>
-                  <a:srgbClr val="111111"/>
-                </a:solidFill>
-                <a:latin typeface="Times New Roman" pitchFamily="34" charset="0"/>
-                <a:ea typeface="Times New Roman" pitchFamily="34" charset="-122"/>
-                <a:cs typeface="Times New Roman" pitchFamily="34" charset="-120"/>
-              </a:rPr>
-              <a:t>At the Equator, the sun rays are ______.</a:t>
-            </a:r>
-            <a:endParaRPr lang="en-US" sz="4000" dirty="0"/>
-          </a:p>
-          <a:p>
-            <a:pPr algn="l" marL="342900" indent="-342900">
-              <a:spcAft>
-                <a:spcPts val="800"/>
-              </a:spcAft>
-              <a:buSzPct val="100000"/>
-              <a:buFont typeface="+mj-lt"/>
-              <a:buAutoNum type="arabicPeriod" startAt="1"/>
-            </a:pPr>
-            <a:r>
-              <a:rPr lang="en-US" sz="4000" dirty="0">
-                <a:solidFill>
-                  <a:srgbClr val="111111"/>
-                </a:solidFill>
-                <a:latin typeface="Times New Roman" pitchFamily="34" charset="0"/>
-                <a:ea typeface="Times New Roman" pitchFamily="34" charset="-122"/>
-                <a:cs typeface="Times New Roman" pitchFamily="34" charset="-120"/>
-              </a:rPr>
-              <a:t>Places near the sea have a ______ temperature range.</a:t>
+              <a:t>It is near the sea.</a:t>
             </a:r>
             <a:endParaRPr lang="en-US" sz="4000" dirty="0"/>
           </a:p>
@@ -13998,7 +14214,7 @@
                 <a:ea typeface="Calibri" pitchFamily="34" charset="-122"/>
                 <a:cs typeface="Calibri" pitchFamily="34" charset="-120"/>
               </a:rPr>
-              <a:t>HOMEWORK</a:t>
+              <a:t>REMEDIATION</a:t>
             </a:r>
             <a:endParaRPr lang="en-US" sz="1400" dirty="0"/>
           </a:p>
@@ -14021,7 +14237,7 @@
         <p:spPr>
           <a:xfrm>
             <a:off x="0" y="658368"/>
-            <a:ext cx="5120640" cy="5833872"/>
+            <a:ext cx="1463040" cy="5833872"/>
           </a:xfrm>
           <a:prstGeom prst="rect">
             <a:avLst/>
@@ -14036,8 +14252,8 @@
         </p:nvSpPr>
         <p:spPr>
           <a:xfrm>
-            <a:off x="5349240" y="1005840"/>
-            <a:ext cx="6522415" cy="731520"/>
+            <a:off x="1691640" y="1005840"/>
+            <a:ext cx="10180015" cy="731520"/>
           </a:xfrm>
           <a:prstGeom prst="rect">
             <a:avLst/>
@@ -14063,7 +14279,7 @@
                 <a:ea typeface="Times New Roman" pitchFamily="34" charset="-122"/>
                 <a:cs typeface="Times New Roman" pitchFamily="34" charset="-120"/>
               </a:rPr>
-              <a:t>Homework</a:t>
+              <a:t>Remediation</a:t>
             </a:r>
             <a:endParaRPr lang="en-US" sz="3600" dirty="0"/>
           </a:p>
@@ -14077,8 +14293,8 @@
         </p:nvSpPr>
         <p:spPr>
           <a:xfrm>
-            <a:off x="5349240" y="1783080"/>
-            <a:ext cx="6522415" cy="4663440"/>
+            <a:off x="1691640" y="1783080"/>
+            <a:ext cx="10180015" cy="4663440"/>
           </a:xfrm>
           <a:prstGeom prst="rect">
             <a:avLst/>
@@ -14097,7 +14313,7 @@
               <a:buNone/>
             </a:pPr>
             <a:r>
-              <a:rPr lang="en-US" sz="4000" dirty="0">
+              <a:rPr lang="en-US" sz="4000" b="1" dirty="0">
                 <a:solidFill>
                   <a:srgbClr val="111111"/>
                 </a:solidFill>
@@ -14105,7 +14321,73 @@
                 <a:ea typeface="Times New Roman" pitchFamily="34" charset="-122"/>
                 <a:cs typeface="Times New Roman" pitchFamily="34" charset="-120"/>
               </a:rPr>
-              <a:t>Put a little water in a bowl in the sun in the morning. In the evening, check how much water is left and write where you think the missing water went.</a:t>
+              <a:t>Fill in the blanks:</a:t>
+            </a:r>
+            <a:endParaRPr lang="en-US" sz="4000" dirty="0"/>
+          </a:p>
+          <a:p>
+            <a:pPr algn="l" marL="342900" indent="-342900">
+              <a:spcAft>
+                <a:spcPts val="800"/>
+              </a:spcAft>
+              <a:buSzPct val="100000"/>
+              <a:buFont typeface="+mj-lt"/>
+              <a:buAutoNum type="arabicPeriod" startAt="1"/>
+            </a:pPr>
+            <a:r>
+              <a:rPr lang="en-US" sz="4000" dirty="0">
+                <a:solidFill>
+                  <a:srgbClr val="111111"/>
+                </a:solidFill>
+                <a:latin typeface="Times New Roman" pitchFamily="34" charset="0"/>
+                <a:ea typeface="Times New Roman" pitchFamily="34" charset="-122"/>
+                <a:cs typeface="Times New Roman" pitchFamily="34" charset="-120"/>
+              </a:rPr>
+              <a:t>Temperature falls when ______ increases.</a:t>
+            </a:r>
+            <a:endParaRPr lang="en-US" sz="4000" dirty="0"/>
+          </a:p>
+          <a:p>
+            <a:pPr algn="l" marL="342900" indent="-342900">
+              <a:spcAft>
+                <a:spcPts val="800"/>
+              </a:spcAft>
+              <a:buSzPct val="100000"/>
+              <a:buFont typeface="+mj-lt"/>
+              <a:buAutoNum type="arabicPeriod" startAt="1"/>
+            </a:pPr>
+            <a:r>
+              <a:rPr lang="en-US" sz="4000" dirty="0">
+                <a:solidFill>
+                  <a:srgbClr val="111111"/>
+                </a:solidFill>
+                <a:latin typeface="Times New Roman" pitchFamily="34" charset="0"/>
+                <a:ea typeface="Times New Roman" pitchFamily="34" charset="-122"/>
+                <a:cs typeface="Times New Roman" pitchFamily="34" charset="-120"/>
+              </a:rPr>
+              <a:t>At the Equator, the sun rays are ______.</a:t>
+            </a:r>
+            <a:endParaRPr lang="en-US" sz="4000" dirty="0"/>
+          </a:p>
+          <a:p>
+            <a:pPr algn="l" marL="342900" indent="-342900">
+              <a:spcAft>
+                <a:spcPts val="800"/>
+              </a:spcAft>
+              <a:buSzPct val="100000"/>
+              <a:buFont typeface="+mj-lt"/>
+              <a:buAutoNum type="arabicPeriod" startAt="1"/>
+            </a:pPr>
+            <a:r>
+              <a:rPr lang="en-US" sz="4000" dirty="0">
+                <a:solidFill>
+                  <a:srgbClr val="111111"/>
+                </a:solidFill>
+                <a:latin typeface="Times New Roman" pitchFamily="34" charset="0"/>
+                <a:ea typeface="Times New Roman" pitchFamily="34" charset="-122"/>
+                <a:cs typeface="Times New Roman" pitchFamily="34" charset="-120"/>
+              </a:rPr>
+              <a:t>Places near the sea have a ______ temperature range.</a:t>
             </a:r>
             <a:endParaRPr lang="en-US" sz="4000" dirty="0"/>
           </a:p>
@@ -14456,7 +14738,7 @@
                 <a:ea typeface="Calibri" pitchFamily="34" charset="-122"/>
                 <a:cs typeface="Calibri" pitchFamily="34" charset="-120"/>
               </a:rPr>
-              <a:t>NEXT LESSON</a:t>
+              <a:t>HOMEWORK</a:t>
             </a:r>
             <a:endParaRPr lang="en-US" sz="1400" dirty="0"/>
           </a:p>
@@ -14521,7 +14803,7 @@
                 <a:ea typeface="Times New Roman" pitchFamily="34" charset="-122"/>
                 <a:cs typeface="Times New Roman" pitchFamily="34" charset="-120"/>
               </a:rPr>
-              <a:t>Next Lesson</a:t>
+              <a:t>Homework</a:t>
             </a:r>
             <a:endParaRPr lang="en-US" sz="3600" dirty="0"/>
           </a:p>
@@ -14545,17 +14827,17 @@
           <a:ln/>
         </p:spPr>
         <p:txBody>
-          <a:bodyPr wrap="square" lIns="0" tIns="0" rIns="0" bIns="0" rtlCol="0" anchor="ctr"/>
-          <a:lstStyle/>
-          <a:p>
-            <a:pPr algn="ctr" indent="0" marL="0">
+          <a:bodyPr wrap="square" lIns="0" tIns="0" rIns="0" bIns="0" rtlCol="0" anchor="t"/>
+          <a:lstStyle/>
+          <a:p>
+            <a:pPr algn="l" indent="0" marL="0">
               <a:spcAft>
                 <a:spcPts val="800"/>
               </a:spcAft>
               <a:buNone/>
             </a:pPr>
             <a:r>
-              <a:rPr lang="en-US" sz="4000" b="1" dirty="0">
+              <a:rPr lang="en-US" sz="4000" dirty="0">
                 <a:solidFill>
                   <a:srgbClr val="111111"/>
                 </a:solidFill>
@@ -14563,27 +14845,7 @@
                 <a:ea typeface="Times New Roman" pitchFamily="34" charset="-122"/>
                 <a:cs typeface="Times New Roman" pitchFamily="34" charset="-120"/>
               </a:rPr>
-              <a:t>Our next lesson will be on:</a:t>
-            </a:r>
-            <a:endParaRPr lang="en-US" sz="4000" dirty="0"/>
-          </a:p>
-          <a:p>
-            <a:pPr algn="ctr" indent="0" marL="0">
-              <a:spcAft>
-                <a:spcPts val="800"/>
-              </a:spcAft>
-              <a:buNone/>
-            </a:pPr>
-            <a:r>
-              <a:rPr lang="en-US" sz="4000" b="1" dirty="0">
-                <a:solidFill>
-                  <a:srgbClr val="990011"/>
-                </a:solidFill>
-                <a:latin typeface="Times New Roman" pitchFamily="34" charset="0"/>
-                <a:ea typeface="Times New Roman" pitchFamily="34" charset="-122"/>
-                <a:cs typeface="Times New Roman" pitchFamily="34" charset="-120"/>
-              </a:rPr>
-              <a:t>Lesson 39: The Hydrological Cycle</a:t>
+              <a:t>Put a little water in a bowl in the sun in the morning. In the evening, check how much water is left and write where you think the missing water went.</a:t>
             </a:r>
             <a:endParaRPr lang="en-US" sz="4000" dirty="0"/>
           </a:p>
@@ -14695,6 +14957,245 @@
                 <a:ea typeface="Calibri" pitchFamily="34" charset="-122"/>
                 <a:cs typeface="Calibri" pitchFamily="34" charset="-120"/>
               </a:rPr>
+              <a:t>NEXT LESSON</a:t>
+            </a:r>
+            <a:endParaRPr lang="en-US" sz="1400" dirty="0"/>
+          </a:p>
+        </p:txBody>
+      </p:sp>
+      <p:pic>
+        <p:nvPicPr>
+          <p:cNvPr id="3" name="Image 0" descr="/home/claude/f4/img/minesec_sheet.png">    </p:cNvPr>
+          <p:cNvPicPr>
+            <a:picLocks noChangeAspect="1"/>
+          </p:cNvPicPr>
+          <p:nvPr/>
+        </p:nvPicPr>
+        <p:blipFill>
+          <a:blip r:embed="rId1"/>
+          <a:stretch>
+            <a:fillRect/>
+          </a:stretch>
+        </p:blipFill>
+        <p:spPr>
+          <a:xfrm>
+            <a:off x="0" y="658368"/>
+            <a:ext cx="5120640" cy="5833872"/>
+          </a:xfrm>
+          <a:prstGeom prst="rect">
+            <a:avLst/>
+          </a:prstGeom>
+        </p:spPr>
+      </p:pic>
+      <p:sp>
+        <p:nvSpPr>
+          <p:cNvPr id="4" name="Text 1"/>
+          <p:cNvSpPr/>
+          <p:nvPr/>
+        </p:nvSpPr>
+        <p:spPr>
+          <a:xfrm>
+            <a:off x="5349240" y="1005840"/>
+            <a:ext cx="6522415" cy="731520"/>
+          </a:xfrm>
+          <a:prstGeom prst="rect">
+            <a:avLst/>
+          </a:prstGeom>
+          <a:noFill/>
+          <a:ln/>
+        </p:spPr>
+        <p:txBody>
+          <a:bodyPr wrap="square" lIns="0" tIns="0" rIns="0" bIns="0" rtlCol="0" anchor="ctr">
+            <a:normAutofit/>
+          </a:bodyPr>
+          <a:lstStyle/>
+          <a:p>
+            <a:pPr algn="ctr" indent="0" marL="0">
+              <a:buNone/>
+            </a:pPr>
+            <a:r>
+              <a:rPr lang="en-US" sz="3600" b="1" dirty="0">
+                <a:solidFill>
+                  <a:srgbClr val="990011"/>
+                </a:solidFill>
+                <a:latin typeface="Times New Roman" pitchFamily="34" charset="0"/>
+                <a:ea typeface="Times New Roman" pitchFamily="34" charset="-122"/>
+                <a:cs typeface="Times New Roman" pitchFamily="34" charset="-120"/>
+              </a:rPr>
+              <a:t>Next Lesson</a:t>
+            </a:r>
+            <a:endParaRPr lang="en-US" sz="3600" dirty="0"/>
+          </a:p>
+        </p:txBody>
+      </p:sp>
+      <p:sp>
+        <p:nvSpPr>
+          <p:cNvPr id="5" name="Text 2"/>
+          <p:cNvSpPr/>
+          <p:nvPr/>
+        </p:nvSpPr>
+        <p:spPr>
+          <a:xfrm>
+            <a:off x="5349240" y="1783080"/>
+            <a:ext cx="6522415" cy="4663440"/>
+          </a:xfrm>
+          <a:prstGeom prst="rect">
+            <a:avLst/>
+          </a:prstGeom>
+          <a:noFill/>
+          <a:ln/>
+        </p:spPr>
+        <p:txBody>
+          <a:bodyPr wrap="square" lIns="0" tIns="0" rIns="0" bIns="0" rtlCol="0" anchor="ctr"/>
+          <a:lstStyle/>
+          <a:p>
+            <a:pPr algn="ctr" indent="0" marL="0">
+              <a:spcAft>
+                <a:spcPts val="800"/>
+              </a:spcAft>
+              <a:buNone/>
+            </a:pPr>
+            <a:r>
+              <a:rPr lang="en-US" sz="4000" b="1" dirty="0">
+                <a:solidFill>
+                  <a:srgbClr val="111111"/>
+                </a:solidFill>
+                <a:latin typeface="Times New Roman" pitchFamily="34" charset="0"/>
+                <a:ea typeface="Times New Roman" pitchFamily="34" charset="-122"/>
+                <a:cs typeface="Times New Roman" pitchFamily="34" charset="-120"/>
+              </a:rPr>
+              <a:t>Our next lesson will be on:</a:t>
+            </a:r>
+            <a:endParaRPr lang="en-US" sz="4000" dirty="0"/>
+          </a:p>
+          <a:p>
+            <a:pPr algn="ctr" indent="0" marL="0">
+              <a:spcAft>
+                <a:spcPts val="800"/>
+              </a:spcAft>
+              <a:buNone/>
+            </a:pPr>
+            <a:r>
+              <a:rPr lang="en-US" sz="4000" b="1" dirty="0">
+                <a:solidFill>
+                  <a:srgbClr val="990011"/>
+                </a:solidFill>
+                <a:latin typeface="Times New Roman" pitchFamily="34" charset="0"/>
+                <a:ea typeface="Times New Roman" pitchFamily="34" charset="-122"/>
+                <a:cs typeface="Times New Roman" pitchFamily="34" charset="-120"/>
+              </a:rPr>
+              <a:t>Lesson 39: The Hydrological Cycle</a:t>
+            </a:r>
+            <a:endParaRPr lang="en-US" sz="4000" dirty="0"/>
+          </a:p>
+        </p:txBody>
+      </p:sp>
+      <p:sp>
+        <p:nvSpPr>
+          <p:cNvPr id="25" name="Slide Number Placeholder 0"/>
+          <p:cNvSpPr>
+            <a:spLocks noGrp="1"/>
+          </p:cNvSpPr>
+          <p:nvPr>
+            <p:ph type="sldNum" sz="quarter" idx="4294967295"/>
+          </p:nvPr>
+        </p:nvSpPr>
+        <p:spPr>
+          <a:xfrm>
+            <a:off x="27432" y="91440"/>
+            <a:ext cx="585216" cy="475488"/>
+          </a:xfrm>
+          <a:prstGeom prst="rect">
+            <a:avLst/>
+          </a:prstGeom>
+          <a:extLst>
+            <a:ext uri="{C572A759-6A51-4108-AA02-DFA0A04FC94B}">
+              <ma14:wrappingTextBoxFlag xmlns:ma14="http://schemas.microsoft.com/office/mac/drawingml/2011/main" val="0"/>
+            </a:ext>
+          </a:extLst>
+        </p:spPr>
+        <p:txBody>
+          <a:bodyPr/>
+          <a:lstStyle>
+            <a:lvl1pPr>
+              <a:defRPr sz="2000">
+                <a:solidFill>
+                  <a:srgbClr val="FFFFFF"/>
+                </a:solidFill>
+                <a:latin typeface="Calibri"/>
+                <a:ea typeface="Calibri"/>
+                <a:cs typeface="Calibri"/>
+              </a:defRPr>
+            </a:lvl1pPr>
+          </a:lstStyle>
+          <a:p>
+            <a:pPr algn="ctr"/>
+            <a:fld id="{F7021451-1387-4CA6-816F-3879F97B5CBC}" type="slidenum">
+              <a:rPr b="1" lang="en-US"/>
+              <a:t>41</a:t>
+            </a:fld>
+            <a:endParaRPr lang="en-US"/>
+          </a:p>
+        </p:txBody>
+      </p:sp>
+    </p:spTree>
+  </p:cSld>
+  <p:clrMapOvr>
+    <a:masterClrMapping/>
+  </p:clrMapOvr>
+</p:sld>
+</file>
+
+<file path=ppt/slides/slide42.xml><?xml version="1.0" encoding="utf-8"?>
+<p:sld xmlns:a="http://schemas.openxmlformats.org/drawingml/2006/main" xmlns:r="http://schemas.openxmlformats.org/officeDocument/2006/relationships" xmlns:p="http://schemas.openxmlformats.org/presentationml/2006/main">
+  <p:cSld name="Slide 42">
+    <p:spTree>
+      <p:nvGrpSpPr>
+        <p:cNvPr id="1" name=""/>
+        <p:cNvGrpSpPr/>
+        <p:nvPr/>
+      </p:nvGrpSpPr>
+      <p:grpSpPr>
+        <a:xfrm>
+          <a:off x="0" y="0"/>
+          <a:ext cx="0" cy="0"/>
+          <a:chOff x="0" y="0"/>
+          <a:chExt cx="0" cy="0"/>
+        </a:xfrm>
+      </p:grpSpPr>
+      <p:sp>
+        <p:nvSpPr>
+          <p:cNvPr id="2" name="Text 0"/>
+          <p:cNvSpPr/>
+          <p:nvPr/>
+        </p:nvSpPr>
+        <p:spPr>
+          <a:xfrm>
+            <a:off x="457200" y="713232"/>
+            <a:ext cx="11368735" cy="274320"/>
+          </a:xfrm>
+          <a:prstGeom prst="rect">
+            <a:avLst/>
+          </a:prstGeom>
+          <a:noFill/>
+          <a:ln/>
+        </p:spPr>
+        <p:txBody>
+          <a:bodyPr wrap="square" lIns="0" tIns="0" rIns="0" bIns="0" rtlCol="0" anchor="ctr"/>
+          <a:lstStyle/>
+          <a:p>
+            <a:pPr algn="r" indent="0" marL="0">
+              <a:buNone/>
+            </a:pPr>
+            <a:r>
+              <a:rPr lang="en-US" sz="1400" b="1" dirty="0">
+                <a:solidFill>
+                  <a:srgbClr val="1C3F6E"/>
+                </a:solidFill>
+                <a:latin typeface="Calibri" pitchFamily="34" charset="0"/>
+                <a:ea typeface="Calibri" pitchFamily="34" charset="-122"/>
+                <a:cs typeface="Calibri" pitchFamily="34" charset="-120"/>
+              </a:rPr>
               <a:t>BILINGUAL GAME</a:t>
             </a:r>
             <a:endParaRPr lang="en-US" sz="1400" dirty="0"/>
@@ -14742,7 +15243,7 @@
       </p:sp>
       <p:graphicFrame>
         <p:nvGraphicFramePr>
-          <p:cNvPr id="42" name="Table 0"/>
+          <p:cNvPr id="43" name="Table 0"/>
           <p:cNvGraphicFramePr>
             <a:graphicFrameLocks noGrp="1"/>
           </p:cNvGraphicFramePr>
@@ -16054,7 +16555,7 @@
             <a:pPr algn="ctr"/>
             <a:fld id="{F7021451-1387-4CA6-816F-3879F97B5CBC}" type="slidenum">
               <a:rPr b="1" lang="en-US"/>
-              <a:t>41</a:t>
+              <a:t>42</a:t>
             </a:fld>
             <a:endParaRPr lang="en-US"/>
           </a:p>
@@ -16068,9 +16569,9 @@
 </p:sld>
 </file>
 
-<file path=ppt/slides/slide42.xml><?xml version="1.0" encoding="utf-8"?>
+<file path=ppt/slides/slide43.xml><?xml version="1.0" encoding="utf-8"?>
 <p:sld xmlns:a="http://schemas.openxmlformats.org/drawingml/2006/main" xmlns:r="http://schemas.openxmlformats.org/officeDocument/2006/relationships" xmlns:p="http://schemas.openxmlformats.org/presentationml/2006/main">
-  <p:cSld name="Slide 42">
+  <p:cSld name="Slide 43">
     <p:spTree>
       <p:nvGrpSpPr>
         <p:cNvPr id="1" name=""/>
@@ -16165,7 +16666,7 @@
       </p:sp>
       <p:graphicFrame>
         <p:nvGraphicFramePr>
-          <p:cNvPr id="43" name="Table 0"/>
+          <p:cNvPr id="44" name="Table 0"/>
           <p:cNvGraphicFramePr>
             <a:graphicFrameLocks noGrp="1"/>
           </p:cNvGraphicFramePr>
@@ -16787,7 +17288,7 @@
             <a:pPr algn="ctr"/>
             <a:fld id="{F7021451-1387-4CA6-816F-3879F97B5CBC}" type="slidenum">
               <a:rPr b="1" lang="en-US"/>
-              <a:t>42</a:t>
+              <a:t>43</a:t>
             </a:fld>
             <a:endParaRPr lang="en-US"/>
           </a:p>
@@ -16801,9 +17302,9 @@
 </p:sld>
 </file>
 
-<file path=ppt/slides/slide43.xml><?xml version="1.0" encoding="utf-8"?>
+<file path=ppt/slides/slide44.xml><?xml version="1.0" encoding="utf-8"?>
 <p:sld xmlns:a="http://schemas.openxmlformats.org/drawingml/2006/main" xmlns:r="http://schemas.openxmlformats.org/officeDocument/2006/relationships" xmlns:p="http://schemas.openxmlformats.org/presentationml/2006/main">
-  <p:cSld name="Slide 43">
+  <p:cSld name="Slide 44">
     <p:spTree>
       <p:nvGrpSpPr>
         <p:cNvPr id="1" name=""/>
@@ -16898,7 +17399,7 @@
       </p:sp>
       <p:graphicFrame>
         <p:nvGraphicFramePr>
-          <p:cNvPr id="44" name="Table 0"/>
+          <p:cNvPr id="45" name="Table 0"/>
           <p:cNvGraphicFramePr>
             <a:graphicFrameLocks noGrp="1"/>
           </p:cNvGraphicFramePr>
@@ -17008,7 +17509,7 @@
                           <a:ea typeface="Calibri" pitchFamily="34" charset="-122"/>
                           <a:cs typeface="Calibri" pitchFamily="34" charset="-120"/>
                         </a:rPr>
-                        <a:t>Latitude and Altitude; Other Factors of Temperature.</a:t>
+                        <a:t>DEFINITIONS; Factors of Temperature.</a:t>
                       </a:r>
                       <a:endParaRPr lang="en-US" sz="1600" dirty="0">
                         <a:latin typeface="Calibri" charset="0"/>
@@ -17658,289 +18159,6 @@
             <a:pPr algn="ctr"/>
             <a:fld id="{F7021451-1387-4CA6-816F-3879F97B5CBC}" type="slidenum">
               <a:rPr b="1" lang="en-US"/>
-              <a:t>43</a:t>
-            </a:fld>
-            <a:endParaRPr lang="en-US"/>
-          </a:p>
-        </p:txBody>
-      </p:sp>
-    </p:spTree>
-  </p:cSld>
-  <p:clrMapOvr>
-    <a:masterClrMapping/>
-  </p:clrMapOvr>
-</p:sld>
-</file>
-
-<file path=ppt/slides/slide44.xml><?xml version="1.0" encoding="utf-8"?>
-<p:sld xmlns:a="http://schemas.openxmlformats.org/drawingml/2006/main" xmlns:r="http://schemas.openxmlformats.org/officeDocument/2006/relationships" xmlns:p="http://schemas.openxmlformats.org/presentationml/2006/main">
-  <p:cSld name="Slide 44">
-    <p:spTree>
-      <p:nvGrpSpPr>
-        <p:cNvPr id="1" name=""/>
-        <p:cNvGrpSpPr/>
-        <p:nvPr/>
-      </p:nvGrpSpPr>
-      <p:grpSpPr>
-        <a:xfrm>
-          <a:off x="0" y="0"/>
-          <a:ext cx="0" cy="0"/>
-          <a:chOff x="0" y="0"/>
-          <a:chExt cx="0" cy="0"/>
-        </a:xfrm>
-      </p:grpSpPr>
-      <p:sp>
-        <p:nvSpPr>
-          <p:cNvPr id="2" name="Text 0"/>
-          <p:cNvSpPr/>
-          <p:nvPr/>
-        </p:nvSpPr>
-        <p:spPr>
-          <a:xfrm>
-            <a:off x="457200" y="713232"/>
-            <a:ext cx="11368735" cy="274320"/>
-          </a:xfrm>
-          <a:prstGeom prst="rect">
-            <a:avLst/>
-          </a:prstGeom>
-          <a:noFill/>
-          <a:ln/>
-        </p:spPr>
-        <p:txBody>
-          <a:bodyPr wrap="square" lIns="0" tIns="0" rIns="0" bIns="0" rtlCol="0" anchor="ctr"/>
-          <a:lstStyle/>
-          <a:p>
-            <a:pPr algn="r" indent="0" marL="0">
-              <a:buNone/>
-            </a:pPr>
-            <a:r>
-              <a:rPr lang="en-US" sz="1400" b="1" dirty="0">
-                <a:solidFill>
-                  <a:srgbClr val="1C3F6E"/>
-                </a:solidFill>
-                <a:latin typeface="Calibri" pitchFamily="34" charset="0"/>
-                <a:ea typeface="Calibri" pitchFamily="34" charset="-122"/>
-                <a:cs typeface="Calibri" pitchFamily="34" charset="-120"/>
-              </a:rPr>
-              <a:t>TEACHER'S NOTE</a:t>
-            </a:r>
-            <a:endParaRPr lang="en-US" sz="1400" dirty="0"/>
-          </a:p>
-        </p:txBody>
-      </p:sp>
-      <p:pic>
-        <p:nvPicPr>
-          <p:cNvPr id="3" name="Image 0" descr="/home/claude/f4/img/minesec_sheet.png">    </p:cNvPr>
-          <p:cNvPicPr>
-            <a:picLocks noChangeAspect="1"/>
-          </p:cNvPicPr>
-          <p:nvPr/>
-        </p:nvPicPr>
-        <p:blipFill>
-          <a:blip r:embed="rId1"/>
-          <a:stretch>
-            <a:fillRect/>
-          </a:stretch>
-        </p:blipFill>
-        <p:spPr>
-          <a:xfrm>
-            <a:off x="0" y="658368"/>
-            <a:ext cx="5120640" cy="5833872"/>
-          </a:xfrm>
-          <a:prstGeom prst="rect">
-            <a:avLst/>
-          </a:prstGeom>
-        </p:spPr>
-      </p:pic>
-      <p:sp>
-        <p:nvSpPr>
-          <p:cNvPr id="4" name="Text 1"/>
-          <p:cNvSpPr/>
-          <p:nvPr/>
-        </p:nvSpPr>
-        <p:spPr>
-          <a:xfrm>
-            <a:off x="5349240" y="1005840"/>
-            <a:ext cx="6522415" cy="731520"/>
-          </a:xfrm>
-          <a:prstGeom prst="rect">
-            <a:avLst/>
-          </a:prstGeom>
-          <a:noFill/>
-          <a:ln/>
-        </p:spPr>
-        <p:txBody>
-          <a:bodyPr wrap="square" lIns="0" tIns="0" rIns="0" bIns="0" rtlCol="0" anchor="ctr">
-            <a:normAutofit/>
-          </a:bodyPr>
-          <a:lstStyle/>
-          <a:p>
-            <a:pPr algn="ctr" indent="0" marL="0">
-              <a:buNone/>
-            </a:pPr>
-            <a:r>
-              <a:rPr lang="en-US" sz="3600" b="1" dirty="0">
-                <a:solidFill>
-                  <a:srgbClr val="990011"/>
-                </a:solidFill>
-                <a:latin typeface="Times New Roman" pitchFamily="34" charset="0"/>
-                <a:ea typeface="Times New Roman" pitchFamily="34" charset="-122"/>
-                <a:cs typeface="Times New Roman" pitchFamily="34" charset="-120"/>
-              </a:rPr>
-              <a:t>Teacher's Note</a:t>
-            </a:r>
-            <a:endParaRPr lang="en-US" sz="3600" dirty="0"/>
-          </a:p>
-        </p:txBody>
-      </p:sp>
-      <p:sp>
-        <p:nvSpPr>
-          <p:cNvPr id="5" name="Text 2"/>
-          <p:cNvSpPr/>
-          <p:nvPr/>
-        </p:nvSpPr>
-        <p:spPr>
-          <a:xfrm>
-            <a:off x="5349240" y="1783080"/>
-            <a:ext cx="6522415" cy="4663440"/>
-          </a:xfrm>
-          <a:prstGeom prst="rect">
-            <a:avLst/>
-          </a:prstGeom>
-          <a:noFill/>
-          <a:ln/>
-        </p:spPr>
-        <p:txBody>
-          <a:bodyPr wrap="square" lIns="0" tIns="0" rIns="0" bIns="0" rtlCol="0" anchor="t"/>
-          <a:lstStyle/>
-          <a:p>
-            <a:pPr algn="l" marL="342900" indent="-342900">
-              <a:spcAft>
-                <a:spcPts val="800"/>
-              </a:spcAft>
-              <a:buSzPct val="100000"/>
-              <a:buChar char="•"/>
-            </a:pPr>
-            <a:r>
-              <a:rPr lang="en-US" sz="2000" dirty="0">
-                <a:solidFill>
-                  <a:srgbClr val="111111"/>
-                </a:solidFill>
-                <a:latin typeface="Calibri" pitchFamily="34" charset="0"/>
-                <a:ea typeface="Calibri" pitchFamily="34" charset="-122"/>
-                <a:cs typeface="Calibri" pitchFamily="34" charset="-120"/>
-              </a:rPr>
-              <a:t>Timing: Homework correction, plan, objectives 4 min | Recall, situation, action 6 min | 3 activities 12 min | Board summary (copying) 15 min | Evaluation, remediation 5 min | Homework, next lesson 3 min | Logbook 5 min</a:t>
-            </a:r>
-            <a:endParaRPr lang="en-US" sz="2000" dirty="0"/>
-          </a:p>
-          <a:p>
-            <a:pPr algn="l" marL="342900" indent="-342900">
-              <a:spcAft>
-                <a:spcPts val="800"/>
-              </a:spcAft>
-              <a:buSzPct val="100000"/>
-              <a:buChar char="•"/>
-            </a:pPr>
-            <a:r>
-              <a:rPr lang="en-US" sz="2000" dirty="0">
-                <a:solidFill>
-                  <a:srgbClr val="111111"/>
-                </a:solidFill>
-                <a:latin typeface="Calibri" pitchFamily="34" charset="0"/>
-                <a:ea typeface="Calibri" pitchFamily="34" charset="-122"/>
-                <a:cs typeface="Calibri" pitchFamily="34" charset="-120"/>
-              </a:rPr>
-              <a:t>Without the projector (Activity 1): shine a torch straight and then at an angle on the table.</a:t>
-            </a:r>
-            <a:endParaRPr lang="en-US" sz="2000" dirty="0"/>
-          </a:p>
-          <a:p>
-            <a:pPr algn="l" marL="342900" indent="-342900">
-              <a:spcAft>
-                <a:spcPts val="800"/>
-              </a:spcAft>
-              <a:buSzPct val="100000"/>
-              <a:buChar char="•"/>
-            </a:pPr>
-            <a:r>
-              <a:rPr lang="en-US" sz="2000" dirty="0">
-                <a:solidFill>
-                  <a:srgbClr val="111111"/>
-                </a:solidFill>
-                <a:latin typeface="Calibri" pitchFamily="34" charset="0"/>
-                <a:ea typeface="Calibri" pitchFamily="34" charset="-122"/>
-                <a:cs typeface="Calibri" pitchFamily="34" charset="-120"/>
-              </a:rPr>
-              <a:t>Without the projector (Activity 2): compare Garoua and Ngaoundéré.</a:t>
-            </a:r>
-            <a:endParaRPr lang="en-US" sz="2000" dirty="0"/>
-          </a:p>
-          <a:p>
-            <a:pPr algn="l" marL="342900" indent="-342900">
-              <a:spcAft>
-                <a:spcPts val="800"/>
-              </a:spcAft>
-              <a:buSzPct val="100000"/>
-              <a:buChar char="•"/>
-            </a:pPr>
-            <a:r>
-              <a:rPr lang="en-US" sz="2000" dirty="0">
-                <a:solidFill>
-                  <a:srgbClr val="111111"/>
-                </a:solidFill>
-                <a:latin typeface="Calibri" pitchFamily="34" charset="0"/>
-                <a:ea typeface="Calibri" pitchFamily="34" charset="-122"/>
-                <a:cs typeface="Calibri" pitchFamily="34" charset="-120"/>
-              </a:rPr>
-              <a:t>Without the projector (Activity 3): ask learners where they rest at midday.</a:t>
-            </a:r>
-            <a:endParaRPr lang="en-US" sz="2000" dirty="0"/>
-          </a:p>
-        </p:txBody>
-      </p:sp>
-      <p:sp>
-        <p:nvSpPr>
-          <p:cNvPr id="25" name="Slide Number Placeholder 0"/>
-          <p:cNvSpPr>
-            <a:spLocks noGrp="1"/>
-          </p:cNvSpPr>
-          <p:nvPr>
-            <p:ph type="sldNum" sz="quarter" idx="4294967295"/>
-          </p:nvPr>
-        </p:nvSpPr>
-        <p:spPr>
-          <a:xfrm>
-            <a:off x="27432" y="91440"/>
-            <a:ext cx="585216" cy="475488"/>
-          </a:xfrm>
-          <a:prstGeom prst="rect">
-            <a:avLst/>
-          </a:prstGeom>
-          <a:extLst>
-            <a:ext uri="{C572A759-6A51-4108-AA02-DFA0A04FC94B}">
-              <ma14:wrappingTextBoxFlag xmlns:ma14="http://schemas.microsoft.com/office/mac/drawingml/2011/main" val="0"/>
-            </a:ext>
-          </a:extLst>
-        </p:spPr>
-        <p:txBody>
-          <a:bodyPr/>
-          <a:lstStyle>
-            <a:lvl1pPr>
-              <a:defRPr sz="2000">
-                <a:solidFill>
-                  <a:srgbClr val="FFFFFF"/>
-                </a:solidFill>
-                <a:latin typeface="Calibri"/>
-                <a:ea typeface="Calibri"/>
-                <a:cs typeface="Calibri"/>
-              </a:defRPr>
-            </a:lvl1pPr>
-          </a:lstStyle>
-          <a:p>
-            <a:pPr algn="ctr"/>
-            <a:fld id="{F7021451-1387-4CA6-816F-3879F97B5CBC}" type="slidenum">
-              <a:rPr b="1" lang="en-US"/>
               <a:t>44</a:t>
             </a:fld>
             <a:endParaRPr lang="en-US"/>
@@ -18005,7 +18223,7 @@
                 <a:ea typeface="Calibri" pitchFamily="34" charset="-122"/>
                 <a:cs typeface="Calibri" pitchFamily="34" charset="-120"/>
               </a:rPr>
-              <a:t>REFERENCES</a:t>
+              <a:t>TEACHER'S NOTE</a:t>
             </a:r>
             <a:endParaRPr lang="en-US" sz="1400" dirty="0"/>
           </a:p>
@@ -18070,7 +18288,7 @@
                 <a:ea typeface="Times New Roman" pitchFamily="34" charset="-122"/>
                 <a:cs typeface="Times New Roman" pitchFamily="34" charset="-120"/>
               </a:rPr>
-              <a:t>References</a:t>
+              <a:t>Teacher's Note</a:t>
             </a:r>
             <a:endParaRPr lang="en-US" sz="3600" dirty="0"/>
           </a:p>
@@ -18105,7 +18323,7 @@
               <a:buChar char="•"/>
             </a:pPr>
             <a:r>
-              <a:rPr lang="en-US" sz="1800" dirty="0">
+              <a:rPr lang="en-US" sz="2000" dirty="0">
                 <a:solidFill>
                   <a:srgbClr val="111111"/>
                 </a:solidFill>
@@ -18113,9 +18331,9 @@
                 <a:ea typeface="Calibri" pitchFamily="34" charset="-122"/>
                 <a:cs typeface="Calibri" pitchFamily="34" charset="-120"/>
               </a:rPr>
-              <a:t>National Geography Syllabus (MINESEC), Form 4 — Module 3: Weather and Climate.</a:t>
-            </a:r>
-            <a:endParaRPr lang="en-US" sz="1800" dirty="0"/>
+              <a:t>Timing: Homework correction, plan, objectives 4 min | Recall, situation, action 6 min | 3 activities 12 min | Board summary (copying) 15 min | Evaluation, remediation 5 min | Homework, next lesson 3 min | Logbook 5 min</a:t>
+            </a:r>
+            <a:endParaRPr lang="en-US" sz="2000" dirty="0"/>
           </a:p>
           <a:p>
             <a:pPr algn="l" marL="342900" indent="-342900">
@@ -18126,7 +18344,7 @@
               <a:buChar char="•"/>
             </a:pPr>
             <a:r>
-              <a:rPr lang="en-US" sz="1800" dirty="0">
+              <a:rPr lang="en-US" sz="2000" dirty="0">
                 <a:solidFill>
                   <a:srgbClr val="111111"/>
                 </a:solidFill>
@@ -18134,9 +18352,9 @@
                 <a:ea typeface="Calibri" pitchFamily="34" charset="-122"/>
                 <a:cs typeface="Calibri" pitchFamily="34" charset="-120"/>
               </a:rPr>
-              <a:t>Teacher's lesson notes (f4.docx), checked and corrected where necessary.</a:t>
-            </a:r>
-            <a:endParaRPr lang="en-US" sz="1800" dirty="0"/>
+              <a:t>Without the projector (Activity 1): shine a torch straight and at an angle on paper.</a:t>
+            </a:r>
+            <a:endParaRPr lang="en-US" sz="2000" dirty="0"/>
           </a:p>
           <a:p>
             <a:pPr algn="l" marL="342900" indent="-342900">
@@ -18147,7 +18365,7 @@
               <a:buChar char="•"/>
             </a:pPr>
             <a:r>
-              <a:rPr lang="en-US" sz="1800" dirty="0">
+              <a:rPr lang="en-US" sz="2000" dirty="0">
                 <a:solidFill>
                   <a:srgbClr val="111111"/>
                 </a:solidFill>
@@ -18155,9 +18373,9 @@
                 <a:ea typeface="Calibri" pitchFamily="34" charset="-122"/>
                 <a:cs typeface="Calibri" pitchFamily="34" charset="-120"/>
               </a:rPr>
-              <a:t>Climate normals of Garoua, Maroua, Ngaoundéré and Douala (via Wikipedia climate tables: NOAA, WMO).</a:t>
-            </a:r>
-            <a:endParaRPr lang="en-US" sz="1800" dirty="0"/>
+              <a:t>Without the projector (Activity 2): compare Garoua and Ngaoundéré.</a:t>
+            </a:r>
+            <a:endParaRPr lang="en-US" sz="2000" dirty="0"/>
           </a:p>
           <a:p>
             <a:pPr algn="l" marL="342900" indent="-342900">
@@ -18168,7 +18386,7 @@
               <a:buChar char="•"/>
             </a:pPr>
             <a:r>
-              <a:rPr lang="en-US" sz="1800" dirty="0">
+              <a:rPr lang="en-US" sz="2000" dirty="0">
                 <a:solidFill>
                   <a:srgbClr val="111111"/>
                 </a:solidFill>
@@ -18176,10 +18394,209 @@
                 <a:ea typeface="Calibri" pitchFamily="34" charset="-122"/>
                 <a:cs typeface="Calibri" pitchFamily="34" charset="-120"/>
               </a:rPr>
-              <a:t>Photo, Activity 2: “Kilimanjaro” by ian 1602, CC BY-NC 2.0, via Flickr (https://www.flickr.com/photos/98181641@N00/2179855841)</a:t>
-            </a:r>
-            <a:endParaRPr lang="en-US" sz="1800" dirty="0"/>
-          </a:p>
+              <a:t>Without the projector (Activity 3): compare the school yard and a shady place.</a:t>
+            </a:r>
+            <a:endParaRPr lang="en-US" sz="2000" dirty="0"/>
+          </a:p>
+        </p:txBody>
+      </p:sp>
+      <p:sp>
+        <p:nvSpPr>
+          <p:cNvPr id="25" name="Slide Number Placeholder 0"/>
+          <p:cNvSpPr>
+            <a:spLocks noGrp="1"/>
+          </p:cNvSpPr>
+          <p:nvPr>
+            <p:ph type="sldNum" sz="quarter" idx="4294967295"/>
+          </p:nvPr>
+        </p:nvSpPr>
+        <p:spPr>
+          <a:xfrm>
+            <a:off x="27432" y="91440"/>
+            <a:ext cx="585216" cy="475488"/>
+          </a:xfrm>
+          <a:prstGeom prst="rect">
+            <a:avLst/>
+          </a:prstGeom>
+          <a:extLst>
+            <a:ext uri="{C572A759-6A51-4108-AA02-DFA0A04FC94B}">
+              <ma14:wrappingTextBoxFlag xmlns:ma14="http://schemas.microsoft.com/office/mac/drawingml/2011/main" val="0"/>
+            </a:ext>
+          </a:extLst>
+        </p:spPr>
+        <p:txBody>
+          <a:bodyPr/>
+          <a:lstStyle>
+            <a:lvl1pPr>
+              <a:defRPr sz="2000">
+                <a:solidFill>
+                  <a:srgbClr val="FFFFFF"/>
+                </a:solidFill>
+                <a:latin typeface="Calibri"/>
+                <a:ea typeface="Calibri"/>
+                <a:cs typeface="Calibri"/>
+              </a:defRPr>
+            </a:lvl1pPr>
+          </a:lstStyle>
+          <a:p>
+            <a:pPr algn="ctr"/>
+            <a:fld id="{F7021451-1387-4CA6-816F-3879F97B5CBC}" type="slidenum">
+              <a:rPr b="1" lang="en-US"/>
+              <a:t>45</a:t>
+            </a:fld>
+            <a:endParaRPr lang="en-US"/>
+          </a:p>
+        </p:txBody>
+      </p:sp>
+    </p:spTree>
+  </p:cSld>
+  <p:clrMapOvr>
+    <a:masterClrMapping/>
+  </p:clrMapOvr>
+</p:sld>
+</file>
+
+<file path=ppt/slides/slide46.xml><?xml version="1.0" encoding="utf-8"?>
+<p:sld xmlns:a="http://schemas.openxmlformats.org/drawingml/2006/main" xmlns:r="http://schemas.openxmlformats.org/officeDocument/2006/relationships" xmlns:p="http://schemas.openxmlformats.org/presentationml/2006/main">
+  <p:cSld name="Slide 46">
+    <p:spTree>
+      <p:nvGrpSpPr>
+        <p:cNvPr id="1" name=""/>
+        <p:cNvGrpSpPr/>
+        <p:nvPr/>
+      </p:nvGrpSpPr>
+      <p:grpSpPr>
+        <a:xfrm>
+          <a:off x="0" y="0"/>
+          <a:ext cx="0" cy="0"/>
+          <a:chOff x="0" y="0"/>
+          <a:chExt cx="0" cy="0"/>
+        </a:xfrm>
+      </p:grpSpPr>
+      <p:sp>
+        <p:nvSpPr>
+          <p:cNvPr id="2" name="Text 0"/>
+          <p:cNvSpPr/>
+          <p:nvPr/>
+        </p:nvSpPr>
+        <p:spPr>
+          <a:xfrm>
+            <a:off x="457200" y="713232"/>
+            <a:ext cx="11368735" cy="274320"/>
+          </a:xfrm>
+          <a:prstGeom prst="rect">
+            <a:avLst/>
+          </a:prstGeom>
+          <a:noFill/>
+          <a:ln/>
+        </p:spPr>
+        <p:txBody>
+          <a:bodyPr wrap="square" lIns="0" tIns="0" rIns="0" bIns="0" rtlCol="0" anchor="ctr"/>
+          <a:lstStyle/>
+          <a:p>
+            <a:pPr algn="r" indent="0" marL="0">
+              <a:buNone/>
+            </a:pPr>
+            <a:r>
+              <a:rPr lang="en-US" sz="1400" b="1" dirty="0">
+                <a:solidFill>
+                  <a:srgbClr val="1C3F6E"/>
+                </a:solidFill>
+                <a:latin typeface="Calibri" pitchFamily="34" charset="0"/>
+                <a:ea typeface="Calibri" pitchFamily="34" charset="-122"/>
+                <a:cs typeface="Calibri" pitchFamily="34" charset="-120"/>
+              </a:rPr>
+              <a:t>REFERENCES</a:t>
+            </a:r>
+            <a:endParaRPr lang="en-US" sz="1400" dirty="0"/>
+          </a:p>
+        </p:txBody>
+      </p:sp>
+      <p:pic>
+        <p:nvPicPr>
+          <p:cNvPr id="3" name="Image 0" descr="/home/claude/f4/img/minesec_sheet.png">    </p:cNvPr>
+          <p:cNvPicPr>
+            <a:picLocks noChangeAspect="1"/>
+          </p:cNvPicPr>
+          <p:nvPr/>
+        </p:nvPicPr>
+        <p:blipFill>
+          <a:blip r:embed="rId1"/>
+          <a:stretch>
+            <a:fillRect/>
+          </a:stretch>
+        </p:blipFill>
+        <p:spPr>
+          <a:xfrm>
+            <a:off x="0" y="658368"/>
+            <a:ext cx="5120640" cy="5833872"/>
+          </a:xfrm>
+          <a:prstGeom prst="rect">
+            <a:avLst/>
+          </a:prstGeom>
+        </p:spPr>
+      </p:pic>
+      <p:sp>
+        <p:nvSpPr>
+          <p:cNvPr id="4" name="Text 1"/>
+          <p:cNvSpPr/>
+          <p:nvPr/>
+        </p:nvSpPr>
+        <p:spPr>
+          <a:xfrm>
+            <a:off x="5349240" y="1005840"/>
+            <a:ext cx="6522415" cy="731520"/>
+          </a:xfrm>
+          <a:prstGeom prst="rect">
+            <a:avLst/>
+          </a:prstGeom>
+          <a:noFill/>
+          <a:ln/>
+        </p:spPr>
+        <p:txBody>
+          <a:bodyPr wrap="square" lIns="0" tIns="0" rIns="0" bIns="0" rtlCol="0" anchor="ctr">
+            <a:normAutofit/>
+          </a:bodyPr>
+          <a:lstStyle/>
+          <a:p>
+            <a:pPr algn="ctr" indent="0" marL="0">
+              <a:buNone/>
+            </a:pPr>
+            <a:r>
+              <a:rPr lang="en-US" sz="3600" b="1" dirty="0">
+                <a:solidFill>
+                  <a:srgbClr val="990011"/>
+                </a:solidFill>
+                <a:latin typeface="Times New Roman" pitchFamily="34" charset="0"/>
+                <a:ea typeface="Times New Roman" pitchFamily="34" charset="-122"/>
+                <a:cs typeface="Times New Roman" pitchFamily="34" charset="-120"/>
+              </a:rPr>
+              <a:t>References</a:t>
+            </a:r>
+            <a:endParaRPr lang="en-US" sz="3600" dirty="0"/>
+          </a:p>
+        </p:txBody>
+      </p:sp>
+      <p:sp>
+        <p:nvSpPr>
+          <p:cNvPr id="5" name="Text 2"/>
+          <p:cNvSpPr/>
+          <p:nvPr/>
+        </p:nvSpPr>
+        <p:spPr>
+          <a:xfrm>
+            <a:off x="5349240" y="1783080"/>
+            <a:ext cx="6522415" cy="4663440"/>
+          </a:xfrm>
+          <a:prstGeom prst="rect">
+            <a:avLst/>
+          </a:prstGeom>
+          <a:noFill/>
+          <a:ln/>
+        </p:spPr>
+        <p:txBody>
+          <a:bodyPr wrap="square" lIns="0" tIns="0" rIns="0" bIns="0" rtlCol="0" anchor="t"/>
+          <a:lstStyle/>
           <a:p>
             <a:pPr algn="l" marL="342900" indent="-342900">
               <a:spcAft>
@@ -18197,7 +18614,7 @@
                 <a:ea typeface="Calibri" pitchFamily="34" charset="-122"/>
                 <a:cs typeface="Calibri" pitchFamily="34" charset="-120"/>
               </a:rPr>
-              <a:t>Photo, Activity 3: “Acacia Tree” by D-Stanley, CC BY 2.0, via Flickr (https://www.flickr.com/photos/79721788@N00/11527335486)</a:t>
+              <a:t>National Geography Syllabus (MINESEC), Form 4 — Module 3: Weather and Climate.</a:t>
             </a:r>
             <a:endParaRPr lang="en-US" sz="1800" dirty="0"/>
           </a:p>
@@ -18218,6 +18635,90 @@
                 <a:ea typeface="Calibri" pitchFamily="34" charset="-122"/>
                 <a:cs typeface="Calibri" pitchFamily="34" charset="-120"/>
               </a:rPr>
+              <a:t>Teacher's lesson notes (f4.docx), checked and corrected where necessary.</a:t>
+            </a:r>
+            <a:endParaRPr lang="en-US" sz="1800" dirty="0"/>
+          </a:p>
+          <a:p>
+            <a:pPr algn="l" marL="342900" indent="-342900">
+              <a:spcAft>
+                <a:spcPts val="800"/>
+              </a:spcAft>
+              <a:buSzPct val="100000"/>
+              <a:buChar char="•"/>
+            </a:pPr>
+            <a:r>
+              <a:rPr lang="en-US" sz="1800" dirty="0">
+                <a:solidFill>
+                  <a:srgbClr val="111111"/>
+                </a:solidFill>
+                <a:latin typeface="Calibri" pitchFamily="34" charset="0"/>
+                <a:ea typeface="Calibri" pitchFamily="34" charset="-122"/>
+                <a:cs typeface="Calibri" pitchFamily="34" charset="-120"/>
+              </a:rPr>
+              <a:t>Climate normals of Garoua, Maroua, Ngaoundéré and Douala (via Wikipedia climate tables: NOAA, WMO).</a:t>
+            </a:r>
+            <a:endParaRPr lang="en-US" sz="1800" dirty="0"/>
+          </a:p>
+          <a:p>
+            <a:pPr algn="l" marL="342900" indent="-342900">
+              <a:spcAft>
+                <a:spcPts val="800"/>
+              </a:spcAft>
+              <a:buSzPct val="100000"/>
+              <a:buChar char="•"/>
+            </a:pPr>
+            <a:r>
+              <a:rPr lang="en-US" sz="1800" dirty="0">
+                <a:solidFill>
+                  <a:srgbClr val="111111"/>
+                </a:solidFill>
+                <a:latin typeface="Calibri" pitchFamily="34" charset="0"/>
+                <a:ea typeface="Calibri" pitchFamily="34" charset="-122"/>
+                <a:cs typeface="Calibri" pitchFamily="34" charset="-120"/>
+              </a:rPr>
+              <a:t>Photo, Activity 2: “Kilimanjaro” by ian 1602, CC BY-NC 2.0, via Flickr (https://www.flickr.com/photos/98181641@N00/2179855841)</a:t>
+            </a:r>
+            <a:endParaRPr lang="en-US" sz="1800" dirty="0"/>
+          </a:p>
+          <a:p>
+            <a:pPr algn="l" marL="342900" indent="-342900">
+              <a:spcAft>
+                <a:spcPts val="800"/>
+              </a:spcAft>
+              <a:buSzPct val="100000"/>
+              <a:buChar char="•"/>
+            </a:pPr>
+            <a:r>
+              <a:rPr lang="en-US" sz="1800" dirty="0">
+                <a:solidFill>
+                  <a:srgbClr val="111111"/>
+                </a:solidFill>
+                <a:latin typeface="Calibri" pitchFamily="34" charset="0"/>
+                <a:ea typeface="Calibri" pitchFamily="34" charset="-122"/>
+                <a:cs typeface="Calibri" pitchFamily="34" charset="-120"/>
+              </a:rPr>
+              <a:t>Photo, Activity 3: “Acacia Tree” by D-Stanley, CC BY 2.0, via Flickr (https://www.flickr.com/photos/79721788@N00/11527335486)</a:t>
+            </a:r>
+            <a:endParaRPr lang="en-US" sz="1800" dirty="0"/>
+          </a:p>
+          <a:p>
+            <a:pPr algn="l" marL="342900" indent="-342900">
+              <a:spcAft>
+                <a:spcPts val="800"/>
+              </a:spcAft>
+              <a:buSzPct val="100000"/>
+              <a:buChar char="•"/>
+            </a:pPr>
+            <a:r>
+              <a:rPr lang="en-US" sz="1800" dirty="0">
+                <a:solidFill>
+                  <a:srgbClr val="111111"/>
+                </a:solidFill>
+                <a:latin typeface="Calibri" pitchFamily="34" charset="0"/>
+                <a:ea typeface="Calibri" pitchFamily="34" charset="-122"/>
+                <a:cs typeface="Calibri" pitchFamily="34" charset="-120"/>
+              </a:rPr>
               <a:t>Diagrams and animations: drawn for this lesson (Geography Department).</a:t>
             </a:r>
             <a:endParaRPr lang="en-US" sz="1800" dirty="0"/>
@@ -18266,7 +18767,7 @@
             <a:pPr algn="ctr"/>
             <a:fld id="{F7021451-1387-4CA6-816F-3879F97B5CBC}" type="slidenum">
               <a:rPr b="1" lang="en-US"/>
-              <a:t>45</a:t>
+              <a:t>46</a:t>
             </a:fld>
             <a:endParaRPr lang="en-US"/>
           </a:p>

--- a/lecons/F3/42_FORM4_LESSON38_Factors_of_Temperature.pptx
+++ b/lecons/F3/42_FORM4_LESSON38_Factors_of_Temperature.pptx
@@ -3451,7 +3451,7 @@
           <a:p>
             <a:r>
               <a:rPr lang="en-US" dirty="0"/>
-              <a:t>Before we start the new lesson, let us correct the homework I gave you at the end of Lesson 37: Local Winds. The question was: Compare the temperature of Garoua with that of Ngaoundéré (ask an adult who has travelled there). Write one sentence to say which town is cooler and one possible reason. Take out your exercise books.</a:t>
+              <a:t>Before we start the new lesson, let us correct the homework I gave you at the end of Lesson 37: Local Winds. The question was: Give two factors of temperature. Take out your exercise books.</a:t>
             </a:r>
             <a:endParaRPr lang="en-US" dirty="0"/>
           </a:p>
@@ -3539,7 +3539,7 @@
           <a:p>
             <a:r>
               <a:rPr lang="en-US" dirty="0"/>
-              <a:t>For your homework: Put a little water in a bowl in the sun in the morning. In the evening, check how much water is left and write where you think the missing water went. We shall correct it at the beginning of our next lesson.</a:t>
+              <a:t>For your homework: Name the four main stages of the water cycle. We shall correct it at the beginning of our next lesson.</a:t>
             </a:r>
             <a:endParaRPr lang="en-US" dirty="0"/>
           </a:p>
@@ -4155,7 +4155,7 @@
           <a:p>
             <a:r>
               <a:rPr lang="en-US" dirty="0"/>
-              <a:t>Here is a good answer. Ngaoundéré is cooler than Garoua because it is at a higher altitude (about 1,100 m against about 200 m): temperature falls with height. Compare it with your own answer and correct your work in red.</a:t>
+              <a:t>Here is a good answer. Latitude and altitude (also cloud cover, winds, ocean currents and vegetation). Compare it with your own answer and correct your work in red.</a:t>
             </a:r>
             <a:endParaRPr lang="en-US" dirty="0"/>
           </a:p>
@@ -14522,7 +14522,7 @@
         <p:spPr>
           <a:xfrm>
             <a:off x="0" y="658368"/>
-            <a:ext cx="3840480" cy="5833872"/>
+            <a:ext cx="5120640" cy="5833872"/>
           </a:xfrm>
           <a:prstGeom prst="rect">
             <a:avLst/>
@@ -14537,8 +14537,8 @@
         </p:nvSpPr>
         <p:spPr>
           <a:xfrm>
-            <a:off x="4069080" y="1005840"/>
-            <a:ext cx="7802575" cy="731520"/>
+            <a:off x="5349240" y="1005840"/>
+            <a:ext cx="6522415" cy="731520"/>
           </a:xfrm>
           <a:prstGeom prst="rect">
             <a:avLst/>
@@ -14578,8 +14578,8 @@
         </p:nvSpPr>
         <p:spPr>
           <a:xfrm>
-            <a:off x="4069080" y="1783080"/>
-            <a:ext cx="7802575" cy="4663440"/>
+            <a:off x="5349240" y="1783080"/>
+            <a:ext cx="6522415" cy="4663440"/>
           </a:xfrm>
           <a:prstGeom prst="rect">
             <a:avLst/>
@@ -14626,7 +14626,7 @@
                 <a:ea typeface="Times New Roman" pitchFamily="34" charset="-122"/>
                 <a:cs typeface="Times New Roman" pitchFamily="34" charset="-120"/>
               </a:rPr>
-              <a:t>Compare the temperature of Garoua with that of Ngaoundéré (ask an adult who has travelled there). Write one sentence to say which town is cooler and one possible reason.</a:t>
+              <a:t>Give two factors of temperature.</a:t>
             </a:r>
             <a:endParaRPr lang="en-US" sz="4000" dirty="0"/>
           </a:p>
@@ -14845,7 +14845,7 @@
                 <a:ea typeface="Times New Roman" pitchFamily="34" charset="-122"/>
                 <a:cs typeface="Times New Roman" pitchFamily="34" charset="-120"/>
               </a:rPr>
-              <a:t>Put a little water in a bowl in the sun in the morning. In the evening, check how much water is left and write where you think the missing water went.</a:t>
+              <a:t>Name the four main stages of the water cycle.</a:t>
             </a:r>
             <a:endParaRPr lang="en-US" sz="4000" dirty="0"/>
           </a:p>
@@ -17785,7 +17785,7 @@
                           <a:ea typeface="Calibri" pitchFamily="34" charset="-122"/>
                           <a:cs typeface="Calibri" pitchFamily="34" charset="-120"/>
                         </a:rPr>
-                        <a:t>Put a little water in a bowl in the sun in the morning. In the evening, check how much water is left and write where you think the missing water went.</a:t>
+                        <a:t>Name the four main stages of the water cycle.</a:t>
                       </a:r>
                       <a:endParaRPr lang="en-US" sz="1600" dirty="0">
                         <a:latin typeface="Calibri" charset="0"/>
@@ -18938,7 +18938,7 @@
                 <a:ea typeface="Times New Roman" pitchFamily="34" charset="-122"/>
                 <a:cs typeface="Times New Roman" pitchFamily="34" charset="-120"/>
               </a:rPr>
-              <a:t>Ngaoundéré is cooler than Garoua because it is at a higher altitude (about 1,100 m against about 200 m): temperature falls with height.</a:t>
+              <a:t>Latitude and altitude (also cloud cover, winds, ocean currents and vegetation).</a:t>
             </a:r>
             <a:endParaRPr lang="en-US" sz="4000" dirty="0"/>
           </a:p>
